--- a/submission/발표자료.pptx
+++ b/submission/발표자료.pptx
@@ -2944,7 +2944,7 @@
               <a:rPr sz="1600">
                 <a:latin typeface="맑은 고딕"/>
               </a:rPr>
-              <a:t>작업자 바디캠과 CCTV로 위험 요소를 판정·재확인하고 조치 지시서를 만드는 피지컬 AI</a:t>
+              <a:t>작업자 바디캠과 CCTV로 위험 요소를 판정·재확인하고, 손동작 명령에 작업자 언어로 답하는 피지컬 AI</a:t>
             </a:r>
           </a:p>
           <a:p/>
@@ -3132,6 +3132,22 @@
                 </a:solidFill>
                 <a:latin typeface="맑은 고딕"/>
               </a:rPr>
+              <a:t>• 작은 공구를 놓침 (못 찾은 위험 9개 중 6개가 바닥 공구)</a:t>
+            </a:r>
+          </a:p>
+          <a:p>
+            <a:pPr>
+              <a:spcAft>
+                <a:spcPts val="400"/>
+              </a:spcAft>
+            </a:pPr>
+            <a:r>
+              <a:rPr sz="1300" b="0">
+                <a:solidFill>
+                  <a:srgbClr val="1E2430"/>
+                </a:solidFill>
+                <a:latin typeface="맑은 고딕"/>
+              </a:rPr>
               <a:t>• Isaac 6.0.1 torch 가 CPU 전용이라 시뮬 안 YOLO 는 CPU (실배치는 GPU·엣지)</a:t>
             </a:r>
           </a:p>
@@ -3148,7 +3164,7 @@
                 </a:solidFill>
                 <a:latin typeface="맑은 고딕"/>
               </a:rPr>
-              <a:t>• 놓친 접근 경고 4건은 모두 CCTV 에서 약 29 m 먼 북쪽 끝 (CCTV 추가 필요)</a:t>
+              <a:t>• 영역 크기·경고 거리·재확인 조건은 규칙</a:t>
             </a:r>
           </a:p>
           <a:p>
@@ -3164,23 +3180,7 @@
                 </a:solidFill>
                 <a:latin typeface="맑은 고딕"/>
               </a:rPr>
-              <a:t>• 통로 바닥 작은 공구를 자주 놓침 (못 찾은 위험 14개 중 12개)</a:t>
-            </a:r>
-          </a:p>
-          <a:p>
-            <a:pPr>
-              <a:spcAft>
-                <a:spcPts val="400"/>
-              </a:spcAft>
-            </a:pPr>
-            <a:r>
-              <a:rPr sz="1300" b="0">
-                <a:solidFill>
-                  <a:srgbClr val="1E2430"/>
-                </a:solidFill>
-                <a:latin typeface="맑은 고딕"/>
-              </a:rPr>
-              <a:t>• 재확인 조건·우선순위는 규칙</a:t>
+              <a:t>• 손동작은 시뮬 맨손만, 다국어 음성은 온라인 TTS</a:t>
             </a:r>
           </a:p>
           <a:p>
@@ -3286,7 +3286,7 @@
                 </a:solidFill>
                 <a:latin typeface="맑은 고딕"/>
               </a:rPr>
-              <a:t>실습실·창고 사진 수백 장으로 미세조정</a:t>
+              <a:t>실습실·창고 사진으로 미세조정, 실제 라바콘·표지</a:t>
             </a:r>
           </a:p>
           <a:p>
@@ -3318,7 +3318,7 @@
                 </a:solidFill>
                 <a:latin typeface="맑은 고딕"/>
               </a:rPr>
-              <a:t>실제 CCTV 보정, 바디캠 1대 + PTZ 1대 현장 시험</a:t>
+              <a:t>바디캠(스피커) 1대 + PTZ 1대 현장 시험, CCTV 보정</a:t>
             </a:r>
           </a:p>
           <a:p>
@@ -3504,7 +3504,7 @@
                 </a:solidFill>
                 <a:latin typeface="맑은 고딕"/>
               </a:rPr>
-              <a:t>디지털 트윈으로 그 현장의 위험 상태 데이터를 만들어 맞춤 학습</a:t>
+              <a:t>현장 표시(라바콘·표지)를 그대로 위험 영역으로 읽고, 디지털 트윈으로 그 현장 데이터를 만들어 학습</a:t>
             </a:r>
           </a:p>
           <a:p>
@@ -3536,7 +3536,7 @@
                 </a:solidFill>
                 <a:latin typeface="맑은 고딕"/>
               </a:rPr>
-              <a:t>점검 누락·기록 공백 감소, 아차사고 관리</a:t>
+              <a:t>점검 누락·기록 공백 감소, 닿기 전 경고로 아차사고 예방</a:t>
             </a:r>
           </a:p>
         </p:txBody>
@@ -4094,7 +4094,7 @@
               <a:rPr>
                 <a:latin typeface="맑은 고딕"/>
               </a:rPr>
-              <a:t>2. 해결: 순찰하며 판정하고, 애매하면 스스로 재확인하는 AI 에이전트</a:t>
+              <a:t>2. 해결: 판정·경고하고 작업자 언어로 답하는 AI 에이전트</a:t>
             </a:r>
           </a:p>
         </p:txBody>
@@ -4127,49 +4127,121 @@
               </a:spcAft>
             </a:pPr>
             <a:r>
-              <a:rPr sz="1700" b="0">
+              <a:rPr sz="1500" b="0">
                 <a:solidFill>
                   <a:srgbClr val="1E2430"/>
                 </a:solidFill>
                 <a:latin typeface="맑은 고딕"/>
               </a:rPr>
-              <a:t>작업자 바디캠과 CCTV 로 위험/안전을 판정하고, 애매한 것은 </a:t>
-            </a:r>
-            <a:r>
-              <a:rPr sz="1700" b="1">
+              <a:t>바디캠과 CCTV 로 위험/안전과 </a:t>
+            </a:r>
+            <a:r>
+              <a:rPr sz="1500" b="1">
                 <a:solidFill>
                   <a:srgbClr val="1E2430"/>
                 </a:solidFill>
                 <a:latin typeface="맑은 고딕"/>
               </a:rPr>
-              <a:t>볼 수 있는 CCTV 를 골라 확대해 다시 확인</a:t>
-            </a:r>
-            <a:r>
-              <a:rPr sz="1700" b="0">
+              <a:t>공구 이름</a:t>
+            </a:r>
+            <a:r>
+              <a:rPr sz="1500" b="0">
                 <a:solidFill>
                   <a:srgbClr val="1E2430"/>
                 </a:solidFill>
                 <a:latin typeface="맑은 고딕"/>
               </a:rPr>
-              <a:t>한 뒤, 작업자 접근을 경고하고 </a:t>
-            </a:r>
-            <a:r>
-              <a:rPr sz="1700" b="1">
+              <a:t>을 판정하고, 애매한 것은 </a:t>
+            </a:r>
+            <a:r>
+              <a:rPr sz="1500" b="1">
                 <a:solidFill>
                   <a:srgbClr val="1E2430"/>
                 </a:solidFill>
                 <a:latin typeface="맑은 고딕"/>
               </a:rPr>
-              <a:t>조치 지시서</a:t>
-            </a:r>
-            <a:r>
-              <a:rPr sz="1700" b="0">
+              <a:t>CCTV 를 골라 확대해 다시 확인</a:t>
+            </a:r>
+            <a:r>
+              <a:rPr sz="1500" b="0">
                 <a:solidFill>
                   <a:srgbClr val="1E2430"/>
                 </a:solidFill>
                 <a:latin typeface="맑은 고딕"/>
               </a:rPr>
-              <a:t>를 만든다</a:t>
+              <a:t>한다. </a:t>
+            </a:r>
+            <a:r>
+              <a:rPr sz="1500" b="1">
+                <a:solidFill>
+                  <a:srgbClr val="1E2430"/>
+                </a:solidFill>
+                <a:latin typeface="맑은 고딕"/>
+              </a:rPr>
+              <a:t>위험 영역</a:t>
+            </a:r>
+            <a:r>
+              <a:rPr sz="1500" b="0">
+                <a:solidFill>
+                  <a:srgbClr val="1E2430"/>
+                </a:solidFill>
+                <a:latin typeface="맑은 고딕"/>
+              </a:rPr>
+              <a:t>에 닿기 직전이면 </a:t>
+            </a:r>
+            <a:r>
+              <a:rPr sz="1500" b="1">
+                <a:solidFill>
+                  <a:srgbClr val="1E2430"/>
+                </a:solidFill>
+                <a:latin typeface="맑은 고딕"/>
+              </a:rPr>
+              <a:t>음성으로 경고</a:t>
+            </a:r>
+            <a:r>
+              <a:rPr sz="1500" b="0">
+                <a:solidFill>
+                  <a:srgbClr val="1E2430"/>
+                </a:solidFill>
+                <a:latin typeface="맑은 고딕"/>
+              </a:rPr>
+              <a:t>하고, 작업자가 </a:t>
+            </a:r>
+            <a:r>
+              <a:rPr sz="1500" b="1">
+                <a:solidFill>
+                  <a:srgbClr val="1E2430"/>
+                </a:solidFill>
+                <a:latin typeface="맑은 고딕"/>
+              </a:rPr>
+              <a:t>손가락 1~5개</a:t>
+            </a:r>
+            <a:r>
+              <a:rPr sz="1500" b="0">
+                <a:solidFill>
+                  <a:srgbClr val="1E2430"/>
+                </a:solidFill>
+                <a:latin typeface="맑은 고딕"/>
+              </a:rPr>
+              <a:t>를 보이면 </a:t>
+            </a:r>
+            <a:r>
+              <a:rPr sz="1500" b="1">
+                <a:solidFill>
+                  <a:srgbClr val="1E2430"/>
+                </a:solidFill>
+                <a:latin typeface="맑은 고딕"/>
+              </a:rPr>
+              <a:t>작업자 언어</a:t>
+            </a:r>
+            <a:r>
+              <a:rPr sz="1500" b="0">
+                <a:solidFill>
+                  <a:srgbClr val="1E2430"/>
+                </a:solidFill>
+                <a:latin typeface="맑은 고딕"/>
+              </a:rPr>
+              <a:t>로 안내·호출·SOS 를 처리한다</a:t>
             </a:r>
           </a:p>
         </p:txBody>
@@ -4190,7 +4262,7 @@
         </p:blipFill>
         <p:spPr>
           <a:xfrm>
-            <a:off x="548640" y="2011680"/>
+            <a:off x="548640" y="2057400"/>
             <a:ext cx="11064240" cy="1787300"/>
           </a:xfrm>
           <a:prstGeom prst="rect">
@@ -4207,7 +4279,7 @@
         <p:spPr>
           <a:xfrm>
             <a:off x="548640" y="4114800"/>
-            <a:ext cx="2103120" cy="1737360"/>
+            <a:ext cx="1773936" cy="1737360"/>
           </a:xfrm>
           <a:prstGeom prst="roundRect">
             <a:avLst>
@@ -4245,13 +4317,13 @@
               </a:spcAft>
             </a:pPr>
             <a:r>
-              <a:rPr sz="1700" b="1">
+              <a:rPr sz="1500" b="1">
                 <a:solidFill>
                   <a:srgbClr val="284E92"/>
                 </a:solidFill>
                 <a:latin typeface="맑은 고딕"/>
               </a:rPr>
-              <a:t>① 바디캠 판정</a:t>
+              <a:t>① 판정</a:t>
             </a:r>
           </a:p>
           <a:p>
@@ -4261,14 +4333,14 @@
               </a:spcAft>
             </a:pPr>
             <a:r>
-              <a:rPr sz="1300" b="0">
+              <a:rPr sz="1200" b="0">
                 <a:solidFill>
                   <a:srgbClr val="1E2430"/>
                 </a:solidFill>
                 <a:latin typeface="맑은 고딕"/>
               </a:rPr>
-              <a:t>YOLO26 이 10개 클래스로
-위험/안전 상태 판정</a:t>
+              <a:t>위험/안전 상태
+공구 이름 8종</a:t>
             </a:r>
           </a:p>
         </p:txBody>
@@ -4281,8 +4353,8 @@
         </p:nvSpPr>
         <p:spPr>
           <a:xfrm>
-            <a:off x="2807208" y="4114800"/>
-            <a:ext cx="2103120" cy="1737360"/>
+            <a:off x="2414016" y="4114800"/>
+            <a:ext cx="1773936" cy="1737360"/>
           </a:xfrm>
           <a:prstGeom prst="roundRect">
             <a:avLst>
@@ -4320,7 +4392,7 @@
               </a:spcAft>
             </a:pPr>
             <a:r>
-              <a:rPr sz="1700" b="1">
+              <a:rPr sz="1500" b="1">
                 <a:solidFill>
                   <a:srgbClr val="E08A00"/>
                 </a:solidFill>
@@ -4336,13 +4408,13 @@
               </a:spcAft>
             </a:pPr>
             <a:r>
-              <a:rPr sz="1300" b="0">
+              <a:rPr sz="1200" b="0">
                 <a:solidFill>
                   <a:srgbClr val="1E2430"/>
                 </a:solidFill>
                 <a:latin typeface="맑은 고딕"/>
               </a:rPr>
-              <a:t>CCTV 선택 → PTZ 확대
+              <a:t>CCTV 선택 → PTZ
 재시도 → 현장 확인</a:t>
             </a:r>
           </a:p>
@@ -4356,8 +4428,8 @@
         </p:nvSpPr>
         <p:spPr>
           <a:xfrm>
-            <a:off x="5065776" y="4114800"/>
-            <a:ext cx="2103120" cy="1737360"/>
+            <a:off x="4279392" y="4114800"/>
+            <a:ext cx="1773936" cy="1737360"/>
           </a:xfrm>
           <a:prstGeom prst="roundRect">
             <a:avLst>
@@ -4395,13 +4467,13 @@
               </a:spcAft>
             </a:pPr>
             <a:r>
-              <a:rPr sz="1700" b="1">
+              <a:rPr sz="1500" b="1">
                 <a:solidFill>
                   <a:srgbClr val="D93A3A"/>
                 </a:solidFill>
                 <a:latin typeface="맑은 고딕"/>
               </a:rPr>
-              <a:t>③ 접근 경고</a:t>
+              <a:t>③ 위험 영역</a:t>
             </a:r>
           </a:p>
           <a:p>
@@ -4411,14 +4483,14 @@
               </a:spcAft>
             </a:pPr>
             <a:r>
-              <a:rPr sz="1300" b="0">
+              <a:rPr sz="1200" b="0">
                 <a:solidFill>
                   <a:srgbClr val="1E2430"/>
                 </a:solidFill>
                 <a:latin typeface="맑은 고딕"/>
               </a:rPr>
-              <a:t>CCTV 3대로 작업자-위험물
-거리 2 m 안이면 경고</a:t>
+              <a:t>라바콘·DANGER 표지
+스스로 판단한 주변</a:t>
             </a:r>
           </a:p>
         </p:txBody>
@@ -4431,8 +4503,8 @@
         </p:nvSpPr>
         <p:spPr>
           <a:xfrm>
-            <a:off x="7324344" y="4114800"/>
-            <a:ext cx="2103120" cy="1737360"/>
+            <a:off x="6144768" y="4114800"/>
+            <a:ext cx="1773936" cy="1737360"/>
           </a:xfrm>
           <a:prstGeom prst="roundRect">
             <a:avLst>
@@ -4470,13 +4542,13 @@
               </a:spcAft>
             </a:pPr>
             <a:r>
-              <a:rPr sz="1700" b="1">
-                <a:solidFill>
-                  <a:srgbClr val="7A5AC8"/>
-                </a:solidFill>
-                <a:latin typeface="맑은 고딕"/>
-              </a:rPr>
-              <a:t>④ 위험물 대장</a:t>
+              <a:rPr sz="1500" b="1">
+                <a:solidFill>
+                  <a:srgbClr val="9B4DCA"/>
+                </a:solidFill>
+                <a:latin typeface="맑은 고딕"/>
+              </a:rPr>
+              <a:t>④ 음성 경고</a:t>
             </a:r>
           </a:p>
           <a:p>
@@ -4486,14 +4558,14 @@
               </a:spcAft>
             </a:pPr>
             <a:r>
-              <a:rPr sz="1300" b="0">
+              <a:rPr sz="1200" b="0">
                 <a:solidFill>
                   <a:srgbClr val="1E2430"/>
                 </a:solidFill>
                 <a:latin typeface="맑은 고딕"/>
               </a:rPr>
-              <a:t>위치·상태·확신도 기억
-점검표 8곳</a:t>
+              <a:t>"경고 경고 위험
+요소가 식별되었습니다"</a:t>
             </a:r>
           </a:p>
         </p:txBody>
@@ -4506,8 +4578,8 @@
         </p:nvSpPr>
         <p:spPr>
           <a:xfrm>
-            <a:off x="9582912" y="4114800"/>
-            <a:ext cx="2103120" cy="1737360"/>
+            <a:off x="8010144" y="4114800"/>
+            <a:ext cx="1773936" cy="1737360"/>
           </a:xfrm>
           <a:prstGeom prst="roundRect">
             <a:avLst>
@@ -4545,13 +4617,13 @@
               </a:spcAft>
             </a:pPr>
             <a:r>
-              <a:rPr sz="1700" b="1">
-                <a:solidFill>
-                  <a:srgbClr val="2E9D5B"/>
-                </a:solidFill>
-                <a:latin typeface="맑은 고딕"/>
-              </a:rPr>
-              <a:t>⑤ 조치 지시서</a:t>
+              <a:rPr sz="1500" b="1">
+                <a:solidFill>
+                  <a:srgbClr val="0A7CC4"/>
+                </a:solidFill>
+                <a:latin typeface="맑은 고딕"/>
+              </a:rPr>
+              <a:t>⑤ 손동작 명령</a:t>
             </a:r>
           </a:p>
           <a:p>
@@ -4561,21 +4633,96 @@
               </a:spcAft>
             </a:pPr>
             <a:r>
-              <a:rPr sz="1300" b="0">
+              <a:rPr sz="1200" b="0">
                 <a:solidFill>
                   <a:srgbClr val="1E2430"/>
                 </a:solidFill>
                 <a:latin typeface="맑은 고딕"/>
               </a:rPr>
-              <a:t>우선순위·위치·조치
-평면도와 기록</a:t>
+              <a:t>손가락 1~5
+중·영·일 음성 안내</a:t>
             </a:r>
           </a:p>
         </p:txBody>
       </p:sp>
       <p:sp>
         <p:nvSpPr>
-          <p:cNvPr id="10" name="TextBox 9"/>
+          <p:cNvPr id="10" name="Rounded Rectangle 9"/>
+          <p:cNvSpPr/>
+          <p:nvPr/>
+        </p:nvSpPr>
+        <p:spPr>
+          <a:xfrm>
+            <a:off x="9875519" y="4114800"/>
+            <a:ext cx="1773936" cy="1737360"/>
+          </a:xfrm>
+          <a:prstGeom prst="roundRect">
+            <a:avLst>
+              <a:gd name="adj" fmla="val 8000"/>
+            </a:avLst>
+          </a:prstGeom>
+          <a:solidFill>
+            <a:srgbClr val="EEF2F8"/>
+          </a:solidFill>
+          <a:ln>
+            <a:noFill/>
+          </a:ln>
+        </p:spPr>
+        <p:style>
+          <a:lnRef idx="1">
+            <a:schemeClr val="accent1"/>
+          </a:lnRef>
+          <a:fillRef idx="3">
+            <a:schemeClr val="accent1"/>
+          </a:fillRef>
+          <a:effectRef idx="2">
+            <a:schemeClr val="accent1"/>
+          </a:effectRef>
+          <a:fontRef idx="minor">
+            <a:schemeClr val="lt1"/>
+          </a:fontRef>
+        </p:style>
+        <p:txBody>
+          <a:bodyPr rtlCol="0" anchor="t" wrap="square" lIns="109728" rIns="109728" tIns="54864" bIns="54864"/>
+          <a:lstStyle/>
+          <a:p>
+            <a:pPr algn="ctr">
+              <a:spcAft>
+                <a:spcPts val="400"/>
+              </a:spcAft>
+            </a:pPr>
+            <a:r>
+              <a:rPr sz="1500" b="1">
+                <a:solidFill>
+                  <a:srgbClr val="2E9D5B"/>
+                </a:solidFill>
+                <a:latin typeface="맑은 고딕"/>
+              </a:rPr>
+              <a:t>⑥ 조치 지시서</a:t>
+            </a:r>
+          </a:p>
+          <a:p>
+            <a:pPr algn="ctr">
+              <a:spcAft>
+                <a:spcPts val="400"/>
+              </a:spcAft>
+            </a:pPr>
+            <a:r>
+              <a:rPr sz="1200" b="0">
+                <a:solidFill>
+                  <a:srgbClr val="1E2430"/>
+                </a:solidFill>
+                <a:latin typeface="맑은 고딕"/>
+              </a:rPr>
+              <a:t>우선순위·위치
+영역 지도와 기록</a:t>
+            </a:r>
+          </a:p>
+        </p:txBody>
+      </p:sp>
+      <p:sp>
+        <p:nvSpPr>
+          <p:cNvPr id="11" name="TextBox 10"/>
           <p:cNvSpPr txBox="1"/>
           <p:nvPr/>
         </p:nvSpPr>
@@ -4607,7 +4754,7 @@
                 </a:solidFill>
                 <a:latin typeface="맑은 고딕"/>
               </a:rPr>
-              <a:t>로봇 없이 바디캠과 기존 CCTV(PTZ) 만으로 동작 · 위험 데이터는 디지털 트윈에서 합성</a:t>
+              <a:t>로봇 없이 바디캠(스피커)과 기존 CCTV(PTZ) 만으로 동작 · 위험 데이터는 디지털 트윈에서 합성</a:t>
             </a:r>
           </a:p>
         </p:txBody>
@@ -4670,8 +4817,8 @@
         </p:blipFill>
         <p:spPr>
           <a:xfrm>
-            <a:off x="457200" y="1143000"/>
-            <a:ext cx="11247120" cy="3893234"/>
+            <a:off x="457200" y="1097280"/>
+            <a:ext cx="11247120" cy="4066266"/>
           </a:xfrm>
           <a:prstGeom prst="rect">
             <a:avLst/>
@@ -4687,7 +4834,7 @@
           <p:nvPr/>
         </p:nvGraphicFramePr>
         <p:xfrm>
-          <a:off x="457200" y="5257800"/>
+          <a:off x="457200" y="5349240"/>
           <a:ext cx="11247114" cy="914400"/>
         </p:xfrm>
         <a:graphic>
@@ -4858,7 +5005,7 @@
                           </a:solidFill>
                           <a:latin typeface="맑은 고딕"/>
                         </a:rPr>
-                        <a:t>위험물 판정, 접근 경고, 조치 지시서</a:t>
+                        <a:t>판정, 위험 영역, 경고, 작업자 요청 응답, 조치 지시서</a:t>
                       </a:r>
                     </a:p>
                   </a:txBody>
@@ -4904,7 +5051,7 @@
                           </a:solidFill>
                           <a:latin typeface="맑은 고딕"/>
                         </a:rPr>
-                        <a:t>재확인 필요 판단 (잠깐 보임, 엇갈림)</a:t>
+                        <a:t>재확인 대상, 공구 자리, 영역 설정, 경고 시점, 손동작 → 명령</a:t>
                       </a:r>
                     </a:p>
                   </a:txBody>
@@ -4927,7 +5074,7 @@
                           </a:solidFill>
                           <a:latin typeface="맑은 고딕"/>
                         </a:rPr>
-                        <a:t>바디캠·CCTV·PTZ 명령·YOLO</a:t>
+                        <a:t>바디캠·CCTV·PTZ 명령·스피커, 손 인식, 다국어 음성</a:t>
                       </a:r>
                     </a:p>
                   </a:txBody>
@@ -4950,7 +5097,7 @@
                           </a:solidFill>
                           <a:latin typeface="맑은 고딕"/>
                         </a:rPr>
-                        <a:t>위험물 대장 (위치·판정 표·상태)</a:t>
+                        <a:t>위험물 대장, 위험 영역, 경고·요청 기록</a:t>
                       </a:r>
                     </a:p>
                   </a:txBody>
@@ -4973,7 +5120,7 @@
                           </a:solidFill>
                           <a:latin typeface="맑은 고딕"/>
                         </a:rPr>
-                        <a:t>판정 수정, 다른 CCTV 재시도, 현장 확인</a:t>
+                        <a:t>판정 수정, 재시도, 현장 확인</a:t>
                       </a:r>
                     </a:p>
                   </a:txBody>
@@ -5032,7 +5179,7 @@
       </p:sp>
       <p:pic>
         <p:nvPicPr>
-          <p:cNvPr id="3" name="Picture 2" descr="fig_cctv_raw.jpg"/>
+          <p:cNvPr id="3" name="Picture 2" descr="fig_zone.jpg"/>
           <p:cNvPicPr>
             <a:picLocks noChangeAspect="1"/>
           </p:cNvPicPr>
@@ -5104,7 +5251,7 @@
                 </a:solidFill>
                 <a:latin typeface="맑은 고딕"/>
               </a:rPr>
-              <a:t>• NVIDIA 소품(소화기, 표지판, 라바콘, 상자, 팔레트, 작업대, 작업자)</a:t>
+              <a:t>• NVIDIA 소품 (소화기, 표지판, 라바콘, 상자, 팔레트, 작업자)</a:t>
             </a:r>
           </a:p>
           <a:p>
@@ -5120,7 +5267,7 @@
                 </a:solidFill>
                 <a:latin typeface="맑은 고딕"/>
               </a:rPr>
-              <a:t>• YCB 실물 스캔 공구 (드릴, 클램프, 가위, 나무토막)</a:t>
+              <a:t>• Poly Haven 실물 스캔 공구 (CC0) + 직접 만든 전동톱, DANGER 표지</a:t>
             </a:r>
           </a:p>
           <a:p>
@@ -5151,7 +5298,7 @@
         </p:nvGraphicFramePr>
         <p:xfrm>
           <a:off x="6309360" y="1188720"/>
-          <a:ext cx="5394960" cy="1645919"/>
+          <a:ext cx="5394960" cy="1865376"/>
         </p:xfrm>
         <a:graphic>
           <a:graphicData uri="http://schemas.openxmlformats.org/drawingml/2006/table">
@@ -5164,7 +5311,7 @@
                 <a:gridCol w="2011680"/>
                 <a:gridCol w="1828800"/>
               </a:tblGrid>
-              <a:tr h="329183">
+              <a:tr h="310896">
                 <a:tc>
                   <a:txBody>
                     <a:bodyPr wrap="square"/>
@@ -5172,7 +5319,7 @@
                     <a:p>
                       <a:pPr algn="ctr"/>
                       <a:r>
-                        <a:rPr sz="1300" b="1">
+                        <a:rPr sz="1200" b="1">
                           <a:solidFill>
                             <a:srgbClr val="FFFFFF"/>
                           </a:solidFill>
@@ -5195,7 +5342,7 @@
                     <a:p>
                       <a:pPr algn="ctr"/>
                       <a:r>
-                        <a:rPr sz="1300" b="1">
+                        <a:rPr sz="1200" b="1">
                           <a:solidFill>
                             <a:srgbClr val="FFFFFF"/>
                           </a:solidFill>
@@ -5218,7 +5365,7 @@
                     <a:p>
                       <a:pPr algn="ctr"/>
                       <a:r>
-                        <a:rPr sz="1300" b="1">
+                        <a:rPr sz="1200" b="1">
                           <a:solidFill>
                             <a:srgbClr val="FFFFFF"/>
                           </a:solidFill>
@@ -5235,7 +5382,7 @@
                   </a:tcPr>
                 </a:tc>
               </a:tr>
-              <a:tr h="329183">
+              <a:tr h="310896">
                 <a:tc>
                   <a:txBody>
                     <a:bodyPr wrap="square"/>
@@ -5243,7 +5390,7 @@
                     <a:p>
                       <a:pPr algn="l"/>
                       <a:r>
-                        <a:rPr sz="1300" b="0">
+                        <a:rPr sz="1200" b="0">
                           <a:solidFill>
                             <a:srgbClr val="1E2430"/>
                           </a:solidFill>
@@ -5266,7 +5413,7 @@
                     <a:p>
                       <a:pPr algn="ctr"/>
                       <a:r>
-                        <a:rPr sz="1300" b="0">
+                        <a:rPr sz="1200" b="0">
                           <a:solidFill>
                             <a:srgbClr val="1E2430"/>
                           </a:solidFill>
@@ -5289,7 +5436,7 @@
                     <a:p>
                       <a:pPr algn="ctr"/>
                       <a:r>
-                        <a:rPr sz="1300" b="0">
+                        <a:rPr sz="1200" b="0">
                           <a:solidFill>
                             <a:srgbClr val="1E2430"/>
                           </a:solidFill>
@@ -5306,7 +5453,7 @@
                   </a:tcPr>
                 </a:tc>
               </a:tr>
-              <a:tr h="329183">
+              <a:tr h="310896">
                 <a:tc>
                   <a:txBody>
                     <a:bodyPr wrap="square"/>
@@ -5314,13 +5461,13 @@
                     <a:p>
                       <a:pPr algn="l"/>
                       <a:r>
-                        <a:rPr sz="1300" b="0">
+                        <a:rPr sz="1200" b="0">
                           <a:solidFill>
                             <a:srgbClr val="1E2430"/>
                           </a:solidFill>
                           <a:latin typeface="맑은 고딕"/>
                         </a:rPr>
-                        <a:t>공구·자재</a:t>
+                        <a:t>공구 8종</a:t>
                       </a:r>
                     </a:p>
                   </a:txBody>
@@ -5337,7 +5484,7 @@
                     <a:p>
                       <a:pPr algn="ctr"/>
                       <a:r>
-                        <a:rPr sz="1300" b="0">
+                        <a:rPr sz="1200" b="0">
                           <a:solidFill>
                             <a:srgbClr val="1E2430"/>
                           </a:solidFill>
@@ -5360,7 +5507,7 @@
                     <a:p>
                       <a:pPr algn="ctr"/>
                       <a:r>
-                        <a:rPr sz="1300" b="0">
+                        <a:rPr sz="1200" b="0">
                           <a:solidFill>
                             <a:srgbClr val="1E2430"/>
                           </a:solidFill>
@@ -5377,7 +5524,7 @@
                   </a:tcPr>
                 </a:tc>
               </a:tr>
-              <a:tr h="329183">
+              <a:tr h="310896">
                 <a:tc>
                   <a:txBody>
                     <a:bodyPr wrap="square"/>
@@ -5385,7 +5532,7 @@
                     <a:p>
                       <a:pPr algn="l"/>
                       <a:r>
-                        <a:rPr sz="1300" b="0">
+                        <a:rPr sz="1200" b="0">
                           <a:solidFill>
                             <a:srgbClr val="1E2430"/>
                           </a:solidFill>
@@ -5408,7 +5555,7 @@
                     <a:p>
                       <a:pPr algn="ctr"/>
                       <a:r>
-                        <a:rPr sz="1300" b="0">
+                        <a:rPr sz="1200" b="0">
                           <a:solidFill>
                             <a:srgbClr val="1E2430"/>
                           </a:solidFill>
@@ -5431,7 +5578,7 @@
                     <a:p>
                       <a:pPr algn="ctr"/>
                       <a:r>
-                        <a:rPr sz="1300" b="0">
+                        <a:rPr sz="1200" b="0">
                           <a:solidFill>
                             <a:srgbClr val="1E2430"/>
                           </a:solidFill>
@@ -5448,7 +5595,7 @@
                   </a:tcPr>
                 </a:tc>
               </a:tr>
-              <a:tr h="329187">
+              <a:tr h="310896">
                 <a:tc>
                   <a:txBody>
                     <a:bodyPr wrap="square"/>
@@ -5456,7 +5603,7 @@
                     <a:p>
                       <a:pPr algn="l"/>
                       <a:r>
-                        <a:rPr sz="1300" b="0">
+                        <a:rPr sz="1200" b="0">
                           <a:solidFill>
                             <a:srgbClr val="1E2430"/>
                           </a:solidFill>
@@ -5479,7 +5626,7 @@
                     <a:p>
                       <a:pPr algn="ctr"/>
                       <a:r>
-                        <a:rPr sz="1300" b="0">
+                        <a:rPr sz="1200" b="0">
                           <a:solidFill>
                             <a:srgbClr val="1E2430"/>
                           </a:solidFill>
@@ -5502,7 +5649,7 @@
                     <a:p>
                       <a:pPr algn="ctr"/>
                       <a:r>
-                        <a:rPr sz="1300" b="0">
+                        <a:rPr sz="1200" b="0">
                           <a:solidFill>
                             <a:srgbClr val="1E2430"/>
                           </a:solidFill>
@@ -5519,6 +5666,68 @@
                   </a:tcPr>
                 </a:tc>
               </a:tr>
+              <a:tr h="310896">
+                <a:tc>
+                  <a:txBody>
+                    <a:bodyPr wrap="square"/>
+                    <a:lstStyle/>
+                    <a:p>
+                      <a:pPr algn="l"/>
+                      <a:r>
+                        <a:rPr sz="1200" b="0">
+                          <a:solidFill>
+                            <a:srgbClr val="1E2430"/>
+                          </a:solidFill>
+                          <a:latin typeface="맑은 고딕"/>
+                        </a:rPr>
+                        <a:t>영역 표시</a:t>
+                      </a:r>
+                    </a:p>
+                  </a:txBody>
+                  <a:tcPr marL="54864" marR="54864" marT="27432" marB="27432">
+                    <a:solidFill>
+                      <a:srgbClr val="FFFFFF"/>
+                    </a:solidFill>
+                  </a:tcPr>
+                </a:tc>
+                <a:tc>
+                  <a:txBody>
+                    <a:bodyPr wrap="square"/>
+                    <a:lstStyle/>
+                    <a:p>
+                      <a:pPr algn="ctr"/>
+                      <a:r>
+                        <a:rPr sz="1200" b="0">
+                          <a:solidFill>
+                            <a:srgbClr val="1E2430"/>
+                          </a:solidFill>
+                          <a:latin typeface="맑은 고딕"/>
+                        </a:rPr>
+                        <a:t>라바콘 링, DANGER 표지</a:t>
+                      </a:r>
+                    </a:p>
+                  </a:txBody>
+                  <a:tcPr marL="54864" marR="54864" marT="27432" marB="27432">
+                    <a:solidFill>
+                      <a:srgbClr val="FFFFFF"/>
+                    </a:solidFill>
+                  </a:tcPr>
+                </a:tc>
+                <a:tc>
+                  <a:txBody>
+                    <a:bodyPr wrap="square"/>
+                    <a:lstStyle/>
+                    <a:p>
+                      <a:pPr algn="ctr"/>
+                    </a:p>
+                  </a:txBody>
+                  <a:tcPr marL="54864" marR="54864" marT="27432" marB="27432">
+                    <a:solidFill>
+                      <a:srgbClr val="FFFFFF"/>
+                    </a:solidFill>
+                  </a:tcPr>
+                </a:tc>
+              </a:tr>
             </a:tbl>
           </a:graphicData>
         </a:graphic>
@@ -5531,8 +5740,8 @@
         </p:nvSpPr>
         <p:spPr>
           <a:xfrm>
-            <a:off x="6309360" y="3108960"/>
-            <a:ext cx="5394960" cy="2926080"/>
+            <a:off x="6309360" y="3246120"/>
+            <a:ext cx="5394960" cy="2834640"/>
           </a:xfrm>
           <a:prstGeom prst="rect">
             <a:avLst/>
@@ -5557,7 +5766,7 @@
                 </a:solidFill>
                 <a:latin typeface="맑은 고딕"/>
               </a:rPr>
-              <a:t>합성 데이터 4000장 → YOLO26s</a:t>
+              <a:t>합성 데이터 7700장 → YOLO26s 19 클래스</a:t>
             </a:r>
           </a:p>
           <a:p>
@@ -5573,7 +5782,7 @@
                 </a:solidFill>
                 <a:latin typeface="맑은 고딕"/>
               </a:rPr>
-              <a:t>• 바디캠 55%, CCTV 30%, 자유 시점 15% · 조명·흔들림 무작위</a:t>
+              <a:t>• 일반 촬영 5000장 + 공구 가까이 1500장 + 운반 카트 1200장</a:t>
             </a:r>
           </a:p>
           <a:p>
@@ -5589,7 +5798,7 @@
                 </a:solidFill>
                 <a:latin typeface="맑은 고딕"/>
               </a:rPr>
-              <a:t>• 같은 종류를 위험/안전 상태로 함께 배치 → 모양이 아니라 상태를 학습</a:t>
+              <a:t>• 바디캠·CCTV·자유 시점, 조명·흔들림 무작위</a:t>
             </a:r>
           </a:p>
           <a:p>
@@ -5605,6 +5814,38 @@
                 </a:solidFill>
                 <a:latin typeface="맑은 고딕"/>
               </a:rPr>
+              <a:t>• 같은 종류를 위험/안전 상태로 함께 배치 → 상태를 학습</a:t>
+            </a:r>
+          </a:p>
+          <a:p>
+            <a:pPr>
+              <a:spcAft>
+                <a:spcPts val="400"/>
+              </a:spcAft>
+            </a:pPr>
+            <a:r>
+              <a:rPr sz="1300" b="0">
+                <a:solidFill>
+                  <a:srgbClr val="1E2430"/>
+                </a:solidFill>
+                <a:latin typeface="맑은 고딕"/>
+              </a:rPr>
+              <a:t>• 공구 8종·운반 카트는 종류로, 공구 위험/안전은 놓인 자리로</a:t>
+            </a:r>
+          </a:p>
+          <a:p>
+            <a:pPr>
+              <a:spcAft>
+                <a:spcPts val="400"/>
+              </a:spcAft>
+            </a:pPr>
+            <a:r>
+              <a:rPr sz="1300" b="0">
+                <a:solidFill>
+                  <a:srgbClr val="1E2430"/>
+                </a:solidFill>
+                <a:latin typeface="맑은 고딕"/>
+              </a:rPr>
               <a:t>• 검증 mAP50 </a:t>
             </a:r>
             <a:r>
@@ -5614,7 +5855,7 @@
                 </a:solidFill>
                 <a:latin typeface="맑은 고딕"/>
               </a:rPr>
-              <a:t>0.923</a:t>
+              <a:t>0.898</a:t>
             </a:r>
             <a:r>
               <a:rPr sz="1300" b="0">
@@ -5623,23 +5864,7 @@
                 </a:solidFill>
                 <a:latin typeface="맑은 고딕"/>
               </a:rPr>
-              <a:t> (mAP50-95 0.733), 위험/안전 짝 혼동 1~4%</a:t>
-            </a:r>
-          </a:p>
-          <a:p>
-            <a:pPr>
-              <a:spcAft>
-                <a:spcPts val="400"/>
-              </a:spcAft>
-            </a:pPr>
-            <a:r>
-              <a:rPr sz="1300" b="0">
-                <a:solidFill>
-                  <a:srgbClr val="1E2430"/>
-                </a:solidFill>
-                <a:latin typeface="맑은 고딕"/>
-              </a:rPr>
-              <a:t>• 960 px, 80 epoch, RTX 4060 Ti 에서 약 2.2시간</a:t>
+              <a:t> (mAP50-95 0.689)</a:t>
             </a:r>
           </a:p>
         </p:txBody>
@@ -5681,7 +5906,7 @@
               <a:rPr>
                 <a:latin typeface="맑은 고딕"/>
               </a:rPr>
-              <a:t>5. 핵심 구현 ①  바디캠 판정과 CCTV 접근 경고</a:t>
+              <a:t>5. 핵심 구현 ①  판정, 위험 영역, 음성 경고</a:t>
             </a:r>
           </a:p>
         </p:txBody>
@@ -5712,7 +5937,7 @@
       </p:pic>
       <p:pic>
         <p:nvPicPr>
-          <p:cNvPr id="4" name="Picture 3" descr="fig_cctv.jpg"/>
+          <p:cNvPr id="4" name="Picture 3" descr="fig_zone_map.png"/>
           <p:cNvPicPr>
             <a:picLocks noChangeAspect="1"/>
           </p:cNvPicPr>
@@ -5768,7 +5993,7 @@
                 </a:solidFill>
                 <a:latin typeface="맑은 고딕"/>
               </a:rPr>
-              <a:t>바디캠 YOLO 판정</a:t>
+              <a:t>바디캠 판정 + 공구 이름</a:t>
             </a:r>
           </a:p>
           <a:p>
@@ -5784,7 +6009,7 @@
                 </a:solidFill>
                 <a:latin typeface="맑은 고딕"/>
               </a:rPr>
-              <a:t>• 가슴 높이 1.38 m, 걸음마다 흔들리는 시점</a:t>
+              <a:t>• ByteTrack 추적으로 같은 물체 판정을 모아 3프레임이면 확정</a:t>
             </a:r>
           </a:p>
           <a:p>
@@ -5800,7 +6025,7 @@
                 </a:solidFill>
                 <a:latin typeface="맑은 고딕"/>
               </a:rPr>
-              <a:t>• ByteTrack 추적으로 같은 물체 판정을 모아 3프레임이면 확정</a:t>
+              <a:t>• 공구는 망치·삽 등 이름까지, 놓인 자리로 위험(바닥)/안전(작업대)</a:t>
             </a:r>
           </a:p>
           <a:p>
@@ -5855,7 +6080,7 @@
                 </a:solidFill>
                 <a:latin typeface="맑은 고딕"/>
               </a:rPr>
-              <a:t>CCTV 접근 경고</a:t>
+              <a:t>위험 영역과 음성 경고</a:t>
             </a:r>
           </a:p>
           <a:p>
@@ -5871,7 +6096,7 @@
                 </a:solidFill>
                 <a:latin typeface="맑은 고딕"/>
               </a:rPr>
-              <a:t>• 작업자·위험물 박스를 바닥 좌표로 바꿔 거리 계산</a:t>
+              <a:t>• 라바콘 2개 이상 묶음, DANGER 표지, 유출·불안정 적재 주변 → 영역</a:t>
             </a:r>
           </a:p>
           <a:p>
@@ -5887,7 +6112,7 @@
                 </a:solidFill>
                 <a:latin typeface="맑은 고딕"/>
               </a:rPr>
-              <a:t>• 2 m 안이면 경고, 그 위험물 우선순위 상향 (거리 오차 중앙값 0.29 m)</a:t>
+              <a:t>• 작업자가 위험물 1 m·영역 0.5 m 안 → "경고 경고 위험 요소가 식별되었습니다"</a:t>
             </a:r>
           </a:p>
           <a:p>
@@ -5903,7 +6128,7 @@
                 </a:solidFill>
                 <a:latin typeface="맑은 고딕"/>
               </a:rPr>
-              <a:t>• 20 m 넘는 추정, 발밑 그림자 오인은 제외</a:t>
+              <a:t>• CCTV 는 2 m 접근 경고 (거리 오차 중앙값 0.29 m)</a:t>
             </a:r>
           </a:p>
         </p:txBody>
@@ -6088,7 +6313,7 @@
                 </a:solidFill>
                 <a:latin typeface="맑은 고딕"/>
               </a:rPr>
-              <a:t>• 랙·적재물 가림, 거리로 CCTV 선택 → PTZ 확대 2장</a:t>
+              <a:t>• 랙·기둥·적재물 가림, 거리로 CCTV 선택 → PTZ 확대 2장</a:t>
             </a:r>
           </a:p>
           <a:p>
@@ -6183,7 +6408,7 @@
                 </a:solidFill>
                 <a:latin typeface="맑은 고딕"/>
               </a:rPr>
-              <a:t>조치 지시서: 평면도(번호 = 우선순위), 조치 목록, 점검표, 기록</a:t>
+              <a:t>조치 지시서: 평면도(번호 = 우선순위, 빨간 영역 = 위험 영역), 조치 목록, 음성 경고 기록</a:t>
             </a:r>
           </a:p>
         </p:txBody>
@@ -6225,14 +6450,14 @@
               <a:rPr>
                 <a:latin typeface="맑은 고딕"/>
               </a:rPr>
-              <a:t>7. 시연: 입력 → 판단 → 도구 실행 → 결과</a:t>
+              <a:t>7. 핵심 구현 ③  손동작 명령 → 작업자 언어 안내</a:t>
             </a:r>
           </a:p>
         </p:txBody>
       </p:sp>
       <p:pic>
         <p:nvPicPr>
-          <p:cNvPr id="3" name="Picture 2" descr="fig_video.png"/>
+          <p:cNvPr id="3" name="Picture 2" descr="fig_gestures.jpg"/>
           <p:cNvPicPr>
             <a:picLocks noChangeAspect="1"/>
           </p:cNvPicPr>
@@ -6246,8 +6471,32 @@
         </p:blipFill>
         <p:spPr>
           <a:xfrm>
-            <a:off x="457200" y="1143000"/>
-            <a:ext cx="7863840" cy="4423410"/>
+            <a:off x="457200" y="1097280"/>
+            <a:ext cx="11247120" cy="1527734"/>
+          </a:xfrm>
+          <a:prstGeom prst="rect">
+            <a:avLst/>
+          </a:prstGeom>
+        </p:spPr>
+      </p:pic>
+      <p:pic>
+        <p:nvPicPr>
+          <p:cNvPr id="4" name="Picture 3" descr="fig_gesture.jpg"/>
+          <p:cNvPicPr>
+            <a:picLocks noChangeAspect="1"/>
+          </p:cNvPicPr>
+          <p:nvPr/>
+        </p:nvPicPr>
+        <p:blipFill>
+          <a:blip r:embed="rId3"/>
+          <a:stretch>
+            <a:fillRect/>
+          </a:stretch>
+        </p:blipFill>
+        <p:spPr>
+          <a:xfrm>
+            <a:off x="457200" y="3429000"/>
+            <a:ext cx="4572000" cy="2571750"/>
           </a:xfrm>
           <a:prstGeom prst="rect">
             <a:avLst/>
@@ -6256,14 +6505,226 @@
       </p:pic>
       <p:sp>
         <p:nvSpPr>
-          <p:cNvPr id="4" name="TextBox 3"/>
+          <p:cNvPr id="5" name="Rounded Rectangle 4"/>
+          <p:cNvSpPr/>
+          <p:nvPr/>
+        </p:nvSpPr>
+        <p:spPr>
+          <a:xfrm>
+            <a:off x="5257800" y="3383280"/>
+            <a:ext cx="3291840" cy="2697480"/>
+          </a:xfrm>
+          <a:prstGeom prst="roundRect">
+            <a:avLst>
+              <a:gd name="adj" fmla="val 8000"/>
+            </a:avLst>
+          </a:prstGeom>
+          <a:solidFill>
+            <a:srgbClr val="EEF2F8"/>
+          </a:solidFill>
+          <a:ln>
+            <a:noFill/>
+          </a:ln>
+        </p:spPr>
+        <p:style>
+          <a:lnRef idx="1">
+            <a:schemeClr val="accent1"/>
+          </a:lnRef>
+          <a:fillRef idx="3">
+            <a:schemeClr val="accent1"/>
+          </a:fillRef>
+          <a:effectRef idx="2">
+            <a:schemeClr val="accent1"/>
+          </a:effectRef>
+          <a:fontRef idx="minor">
+            <a:schemeClr val="lt1"/>
+          </a:fontRef>
+        </p:style>
+        <p:txBody>
+          <a:bodyPr rtlCol="0" anchor="t" wrap="square" lIns="109728" rIns="109728" tIns="54864" bIns="54864"/>
+          <a:lstStyle/>
+          <a:p>
+            <a:pPr algn="ctr">
+              <a:spcAft>
+                <a:spcPts val="400"/>
+              </a:spcAft>
+            </a:pPr>
+            <a:r>
+              <a:rPr sz="1500" b="1">
+                <a:solidFill>
+                  <a:srgbClr val="284E92"/>
+                </a:solidFill>
+                <a:latin typeface="맑은 고딕"/>
+              </a:rPr>
+              <a:t>어떻게 알아듣나</a:t>
+            </a:r>
+          </a:p>
+          <a:p>
+            <a:pPr>
+              <a:spcAft>
+                <a:spcPts val="400"/>
+              </a:spcAft>
+            </a:pPr>
+            <a:r>
+              <a:rPr sz="1100" b="0">
+                <a:solidFill>
+                  <a:srgbClr val="1E2430"/>
+                </a:solidFill>
+                <a:latin typeface="맑은 고딕"/>
+              </a:rPr>
+              <a:t>• MediaPipe 손 관절 21점 → 손가락마다 곧은지·손목에서 먼지, 엄지는 약지 뿌리까지 거리</a:t>
+            </a:r>
+          </a:p>
+          <a:p>
+            <a:pPr>
+              <a:spcAft>
+                <a:spcPts val="400"/>
+              </a:spcAft>
+            </a:pPr>
+            <a:r>
+              <a:rPr sz="1100" b="0">
+                <a:solidFill>
+                  <a:srgbClr val="1E2430"/>
+                </a:solidFill>
+                <a:latin typeface="맑은 고딕"/>
+              </a:rPr>
+              <a:t>• 같은 수가 3번 연속이면 명령 (손을 내려야 다시)</a:t>
+            </a:r>
+          </a:p>
+          <a:p>
+            <a:pPr>
+              <a:spcAft>
+                <a:spcPts val="400"/>
+              </a:spcAft>
+            </a:pPr>
+            <a:r>
+              <a:rPr sz="1100" b="0">
+                <a:solidFill>
+                  <a:srgbClr val="1E2430"/>
+                </a:solidFill>
+                <a:latin typeface="맑은 고딕"/>
+              </a:rPr>
+              <a:t>• 안내는 검수한 4개 언어 문장 틀 + 현장 용어집 (번역기는 '안전화→seat belt' 처럼 틀려서 안 씀)</a:t>
+            </a:r>
+          </a:p>
+        </p:txBody>
+      </p:sp>
+      <p:sp>
+        <p:nvSpPr>
+          <p:cNvPr id="6" name="Rounded Rectangle 5"/>
+          <p:cNvSpPr/>
+          <p:nvPr/>
+        </p:nvSpPr>
+        <p:spPr>
+          <a:xfrm>
+            <a:off x="8732520" y="3383280"/>
+            <a:ext cx="2971800" cy="2697480"/>
+          </a:xfrm>
+          <a:prstGeom prst="roundRect">
+            <a:avLst>
+              <a:gd name="adj" fmla="val 8000"/>
+            </a:avLst>
+          </a:prstGeom>
+          <a:solidFill>
+            <a:srgbClr val="EEF2F8"/>
+          </a:solidFill>
+          <a:ln>
+            <a:noFill/>
+          </a:ln>
+        </p:spPr>
+        <p:style>
+          <a:lnRef idx="1">
+            <a:schemeClr val="accent1"/>
+          </a:lnRef>
+          <a:fillRef idx="3">
+            <a:schemeClr val="accent1"/>
+          </a:fillRef>
+          <a:effectRef idx="2">
+            <a:schemeClr val="accent1"/>
+          </a:effectRef>
+          <a:fontRef idx="minor">
+            <a:schemeClr val="lt1"/>
+          </a:fontRef>
+        </p:style>
+        <p:txBody>
+          <a:bodyPr rtlCol="0" anchor="t" wrap="square" lIns="109728" rIns="109728" tIns="54864" bIns="54864"/>
+          <a:lstStyle/>
+          <a:p>
+            <a:pPr algn="ctr">
+              <a:spcAft>
+                <a:spcPts val="400"/>
+              </a:spcAft>
+            </a:pPr>
+            <a:r>
+              <a:rPr sz="1500" b="1">
+                <a:solidFill>
+                  <a:srgbClr val="284E92"/>
+                </a:solidFill>
+                <a:latin typeface="맑은 고딕"/>
+              </a:rPr>
+              <a:t>결과</a:t>
+            </a:r>
+          </a:p>
+          <a:p>
+            <a:pPr>
+              <a:spcAft>
+                <a:spcPts val="400"/>
+              </a:spcAft>
+            </a:pPr>
+            <a:r>
+              <a:rPr sz="3000" b="1">
+                <a:solidFill>
+                  <a:srgbClr val="1E2430"/>
+                </a:solidFill>
+                <a:latin typeface="맑은 고딕"/>
+              </a:rPr>
+              <a:t>35/40</a:t>
+            </a:r>
+          </a:p>
+          <a:p>
+            <a:pPr>
+              <a:spcAft>
+                <a:spcPts val="400"/>
+              </a:spcAft>
+            </a:pPr>
+            <a:r>
+              <a:rPr sz="1100" b="0">
+                <a:solidFill>
+                  <a:srgbClr val="5A6370"/>
+                </a:solidFill>
+                <a:latin typeface="맑은 고딕"/>
+              </a:rPr>
+              <a:t>경로 8곳·조명 바꿔 손가락 1~5, 다른 명령 1번, 움직이는 손 잘못 실행 0</a:t>
+            </a:r>
+          </a:p>
+          <a:p>
+            <a:pPr>
+              <a:spcAft>
+                <a:spcPts val="400"/>
+              </a:spcAft>
+            </a:pPr>
+            <a:r>
+              <a:rPr sz="1200" b="0">
+                <a:solidFill>
+                  <a:srgbClr val="1E2430"/>
+                </a:solidFill>
+                <a:latin typeface="맑은 고딕"/>
+              </a:rPr>
+              <a:t>시연 4/4 · English</a:t>
+            </a:r>
+          </a:p>
+        </p:txBody>
+      </p:sp>
+      <p:sp>
+        <p:nvSpPr>
+          <p:cNvPr id="7" name="TextBox 6"/>
           <p:cNvSpPr txBox="1"/>
           <p:nvPr/>
         </p:nvSpPr>
         <p:spPr>
           <a:xfrm>
-            <a:off x="8503920" y="1143000"/>
-            <a:ext cx="3246120" cy="4846320"/>
+            <a:off x="457200" y="6126480"/>
+            <a:ext cx="11247120" cy="320040"/>
           </a:xfrm>
           <a:prstGeom prst="rect">
             <a:avLst/>
@@ -6276,186 +6737,19 @@
           </a:bodyPr>
           <a:lstStyle/>
           <a:p>
-            <a:pPr>
-              <a:spcAft>
-                <a:spcPts val="400"/>
-              </a:spcAft>
-            </a:pPr>
-            <a:r>
-              <a:rPr sz="1700" b="1">
-                <a:solidFill>
-                  <a:srgbClr val="284E92"/>
-                </a:solidFill>
-                <a:latin typeface="맑은 고딕"/>
-              </a:rPr>
-              <a:t>시연 영상 (1분 44초)</a:t>
-            </a:r>
-          </a:p>
-          <a:p>
-            <a:pPr>
-              <a:spcAft>
-                <a:spcPts val="400"/>
-              </a:spcAft>
-            </a:pPr>
-            <a:r>
-              <a:rPr sz="1300" b="0">
+            <a:pPr algn="ctr">
+              <a:spcAft>
+                <a:spcPts val="400"/>
+              </a:spcAft>
+            </a:pPr>
+            <a:r>
+              <a:rPr sz="1200" b="0">
                 <a:solidFill>
                   <a:srgbClr val="5A6370"/>
                 </a:solidFill>
                 <a:latin typeface="맑은 고딕"/>
               </a:rPr>
-              <a:t>시나리오 1, 실시간 1배속</a:t>
-            </a:r>
-          </a:p>
-          <a:p>
-            <a:pPr>
-              <a:spcAft>
-                <a:spcPts val="400"/>
-              </a:spcAft>
-            </a:pPr>
-            <a:r>
-              <a:rPr sz="1400" b="0">
-                <a:solidFill>
-                  <a:srgbClr val="1E2430"/>
-                </a:solidFill>
-                <a:latin typeface="맑은 고딕"/>
-              </a:rPr>
-              <a:t>① 순찰 전 점검 계획</a:t>
-            </a:r>
-          </a:p>
-          <a:p>
-            <a:pPr>
-              <a:spcAft>
-                <a:spcPts val="400"/>
-              </a:spcAft>
-            </a:pPr>
-            <a:r>
-              <a:rPr sz="1400" b="0">
-                <a:solidFill>
-                  <a:srgbClr val="1E2430"/>
-                </a:solidFill>
-                <a:latin typeface="맑은 고딕"/>
-              </a:rPr>
-              <a:t>② 바디캠 위험/안전 판정</a:t>
-            </a:r>
-          </a:p>
-          <a:p>
-            <a:pPr>
-              <a:spcAft>
-                <a:spcPts val="400"/>
-              </a:spcAft>
-            </a:pPr>
-            <a:r>
-              <a:rPr sz="1400" b="0">
-                <a:solidFill>
-                  <a:srgbClr val="1E2430"/>
-                </a:solidFill>
-                <a:latin typeface="맑은 고딕"/>
-              </a:rPr>
-              <a:t>③ 애매한 물체 → CCTV 선택 → 확대 재확인</a:t>
-            </a:r>
-          </a:p>
-          <a:p>
-            <a:pPr>
-              <a:spcAft>
-                <a:spcPts val="400"/>
-              </a:spcAft>
-            </a:pPr>
-            <a:r>
-              <a:rPr sz="1400" b="0">
-                <a:solidFill>
-                  <a:srgbClr val="1E2430"/>
-                </a:solidFill>
-                <a:latin typeface="맑은 고딕"/>
-              </a:rPr>
-              <a:t>④ 작업자 접근 경고</a:t>
-            </a:r>
-          </a:p>
-          <a:p>
-            <a:pPr>
-              <a:spcAft>
-                <a:spcPts val="400"/>
-              </a:spcAft>
-            </a:pPr>
-            <a:r>
-              <a:rPr sz="1400" b="0">
-                <a:solidFill>
-                  <a:srgbClr val="1E2430"/>
-                </a:solidFill>
-                <a:latin typeface="맑은 고딕"/>
-              </a:rPr>
-              <a:t>⑤ 순찰 끝 점검표 확대 확인</a:t>
-            </a:r>
-          </a:p>
-          <a:p>
-            <a:pPr>
-              <a:spcAft>
-                <a:spcPts val="400"/>
-              </a:spcAft>
-            </a:pPr>
-            <a:r>
-              <a:rPr sz="1400" b="0">
-                <a:solidFill>
-                  <a:srgbClr val="1E2430"/>
-                </a:solidFill>
-                <a:latin typeface="맑은 고딕"/>
-              </a:rPr>
-              <a:t>⑥ 조치 지시서</a:t>
-            </a:r>
-          </a:p>
-          <a:p>
-            <a:pPr>
-              <a:spcAft>
-                <a:spcPts val="400"/>
-              </a:spcAft>
-            </a:pPr>
-            <a:r>
-              <a:rPr sz="1400" b="0">
-                <a:solidFill>
-                  <a:srgbClr val="1E2430"/>
-                </a:solidFill>
-                <a:latin typeface="맑은 고딕"/>
-              </a:rPr>
-              <a:t>⑦ 정답표 채점 결과</a:t>
-            </a:r>
-          </a:p>
-          <a:p>
-            <a:pPr>
-              <a:spcAft>
-                <a:spcPts val="400"/>
-              </a:spcAft>
-            </a:pPr>
-          </a:p>
-          <a:p>
-            <a:pPr>
-              <a:spcAft>
-                <a:spcPts val="400"/>
-              </a:spcAft>
-            </a:pPr>
-            <a:r>
-              <a:rPr sz="1500" b="1">
-                <a:solidFill>
-                  <a:srgbClr val="284E92"/>
-                </a:solidFill>
-                <a:latin typeface="맑은 고딕"/>
-              </a:rPr>
-              <a:t>실행</a:t>
-            </a:r>
-          </a:p>
-          <a:p>
-            <a:pPr>
-              <a:spcAft>
-                <a:spcPts val="400"/>
-              </a:spcAft>
-            </a:pPr>
-            <a:r>
-              <a:rPr sz="1100" b="0">
-                <a:solidFill>
-                  <a:srgbClr val="5A6370"/>
-                </a:solidFill>
-                <a:latin typeface="맑은 고딕"/>
-              </a:rPr>
-              <a:t>run_patrol.py --view bodycam|top|ptz</a:t>
+              <a:t>시연 영상 (2분 48초): TBM(3) → 순찰·판정 → 운반 카트 설명(1) → 상자 싣고 끌기 → 공장 위험 스캔(2) → 관리자 호출(4) → 조치 지시서</a:t>
             </a:r>
           </a:p>
         </p:txBody>
@@ -6512,7 +6806,7 @@
         </p:nvGraphicFramePr>
         <p:xfrm>
           <a:off x="457200" y="1234440"/>
-          <a:ext cx="6766560" cy="2743200"/>
+          <a:ext cx="6766560" cy="2633472"/>
         </p:xfrm>
         <a:graphic>
           <a:graphicData uri="http://schemas.openxmlformats.org/drawingml/2006/table">
@@ -6525,7 +6819,7 @@
                 <a:gridCol w="1737360"/>
                 <a:gridCol w="1737360"/>
               </a:tblGrid>
-              <a:tr h="457200">
+              <a:tr h="438912">
                 <a:tc>
                   <a:txBody>
                     <a:bodyPr wrap="square"/>
@@ -6596,7 +6890,7 @@
                   </a:tcPr>
                 </a:tc>
               </a:tr>
-              <a:tr h="457200">
+              <a:tr h="438912">
                 <a:tc>
                   <a:txBody>
                     <a:bodyPr wrap="square"/>
@@ -6610,7 +6904,7 @@
                           </a:solidFill>
                           <a:latin typeface="맑은 고딕"/>
                         </a:rPr>
-                        <a:t>위험 물체를 위험으로 (72개)</a:t>
+                        <a:t>위험 물체를 위험으로 (92개)</a:t>
                       </a:r>
                     </a:p>
                   </a:txBody>
@@ -6633,7 +6927,7 @@
                           </a:solidFill>
                           <a:latin typeface="맑은 고딕"/>
                         </a:rPr>
-                        <a:t>43 (60%)</a:t>
+                        <a:t>71 (77%)</a:t>
                       </a:r>
                     </a:p>
                   </a:txBody>
@@ -6656,7 +6950,7 @@
                           </a:solidFill>
                           <a:latin typeface="맑은 고딕"/>
                         </a:rPr>
-                        <a:t>58 (81%)</a:t>
+                        <a:t>83 (90%)</a:t>
                       </a:r>
                     </a:p>
                   </a:txBody>
@@ -6667,7 +6961,7 @@
                   </a:tcPr>
                 </a:tc>
               </a:tr>
-              <a:tr h="457200">
+              <a:tr h="438912">
                 <a:tc>
                   <a:txBody>
                     <a:bodyPr wrap="square"/>
@@ -6681,7 +6975,7 @@
                           </a:solidFill>
                           <a:latin typeface="맑은 고딕"/>
                         </a:rPr>
-                        <a:t>안전 물체를 안전으로 (102개)</a:t>
+                        <a:t>안전 물체를 안전으로 (81개)</a:t>
                       </a:r>
                     </a:p>
                   </a:txBody>
@@ -6704,7 +6998,7 @@
                           </a:solidFill>
                           <a:latin typeface="맑은 고딕"/>
                         </a:rPr>
-                        <a:t>50 (49%)</a:t>
+                        <a:t>33 (41%)</a:t>
                       </a:r>
                     </a:p>
                   </a:txBody>
@@ -6727,7 +7021,7 @@
                           </a:solidFill>
                           <a:latin typeface="맑은 고딕"/>
                         </a:rPr>
-                        <a:t>98 (96%)</a:t>
+                        <a:t>78 (96%)</a:t>
                       </a:r>
                     </a:p>
                   </a:txBody>
@@ -6738,7 +7032,7 @@
                   </a:tcPr>
                 </a:tc>
               </a:tr>
-              <a:tr h="457200">
+              <a:tr h="438912">
                 <a:tc>
                   <a:txBody>
                     <a:bodyPr wrap="square"/>
@@ -6809,7 +7103,7 @@
                   </a:tcPr>
                 </a:tc>
               </a:tr>
-              <a:tr h="457200">
+              <a:tr h="438912">
                 <a:tc>
                   <a:txBody>
                     <a:bodyPr wrap="square"/>
@@ -6846,7 +7140,7 @@
                           </a:solidFill>
                           <a:latin typeface="맑은 고딕"/>
                         </a:rPr>
-                        <a:t>4</a:t>
+                        <a:t>11</a:t>
                       </a:r>
                     </a:p>
                   </a:txBody>
@@ -6869,7 +7163,7 @@
                           </a:solidFill>
                           <a:latin typeface="맑은 고딕"/>
                         </a:rPr>
-                        <a:t>2</a:t>
+                        <a:t>8</a:t>
                       </a:r>
                     </a:p>
                   </a:txBody>
@@ -6880,7 +7174,7 @@
                   </a:tcPr>
                 </a:tc>
               </a:tr>
-              <a:tr h="457200">
+              <a:tr h="438912">
                 <a:tc>
                   <a:txBody>
                     <a:bodyPr wrap="square"/>
@@ -6940,7 +7234,357 @@
                           </a:solidFill>
                           <a:latin typeface="맑은 고딕"/>
                         </a:rPr>
-                        <a:t>9 (5)</a:t>
+                        <a:t>8 (7)</a:t>
+                      </a:r>
+                    </a:p>
+                  </a:txBody>
+                  <a:tcPr marL="54864" marR="54864" marT="27432" marB="27432">
+                    <a:solidFill>
+                      <a:srgbClr val="FFFFFF"/>
+                    </a:solidFill>
+                  </a:tcPr>
+                </a:tc>
+              </a:tr>
+            </a:tbl>
+          </a:graphicData>
+        </a:graphic>
+      </p:graphicFrame>
+      <p:graphicFrame>
+        <p:nvGraphicFramePr>
+          <p:cNvPr id="4" name="Table 3"/>
+          <p:cNvGraphicFramePr>
+            <a:graphicFrameLocks noGrp="1"/>
+          </p:cNvGraphicFramePr>
+          <p:nvPr/>
+        </p:nvGraphicFramePr>
+        <p:xfrm>
+          <a:off x="457200" y="3931920"/>
+          <a:ext cx="6766560" cy="2304288"/>
+        </p:xfrm>
+        <a:graphic>
+          <a:graphicData uri="http://schemas.openxmlformats.org/drawingml/2006/table">
+            <a:tbl>
+              <a:tblPr firstRow="1" bandRow="1">
+                <a:tableStyleId>{5C22544A-7EE6-4342-B048-85BDC9FD1C3A}</a:tableStyleId>
+              </a:tblPr>
+              <a:tblGrid>
+                <a:gridCol w="4206240"/>
+                <a:gridCol w="2560320"/>
+              </a:tblGrid>
+              <a:tr h="384048">
+                <a:tc>
+                  <a:txBody>
+                    <a:bodyPr wrap="square"/>
+                    <a:lstStyle/>
+                    <a:p>
+                      <a:pPr algn="ctr"/>
+                      <a:r>
+                        <a:rPr sz="1300" b="1">
+                          <a:solidFill>
+                            <a:srgbClr val="FFFFFF"/>
+                          </a:solidFill>
+                          <a:latin typeface="맑은 고딕"/>
+                        </a:rPr>
+                        <a:t>새 기능</a:t>
+                      </a:r>
+                    </a:p>
+                  </a:txBody>
+                  <a:tcPr marL="54864" marR="54864" marT="27432" marB="27432">
+                    <a:solidFill>
+                      <a:srgbClr val="284E92"/>
+                    </a:solidFill>
+                  </a:tcPr>
+                </a:tc>
+                <a:tc>
+                  <a:txBody>
+                    <a:bodyPr wrap="square"/>
+                    <a:lstStyle/>
+                    <a:p>
+                      <a:pPr algn="ctr"/>
+                      <a:r>
+                        <a:rPr sz="1300" b="1">
+                          <a:solidFill>
+                            <a:srgbClr val="FFFFFF"/>
+                          </a:solidFill>
+                          <a:latin typeface="맑은 고딕"/>
+                        </a:rPr>
+                        <a:t>결과</a:t>
+                      </a:r>
+                    </a:p>
+                  </a:txBody>
+                  <a:tcPr marL="54864" marR="54864" marT="27432" marB="27432">
+                    <a:solidFill>
+                      <a:srgbClr val="284E92"/>
+                    </a:solidFill>
+                  </a:tcPr>
+                </a:tc>
+              </a:tr>
+              <a:tr h="384048">
+                <a:tc>
+                  <a:txBody>
+                    <a:bodyPr wrap="square"/>
+                    <a:lstStyle/>
+                    <a:p>
+                      <a:pPr algn="l"/>
+                      <a:r>
+                        <a:rPr sz="1300" b="0">
+                          <a:solidFill>
+                            <a:srgbClr val="1E2430"/>
+                          </a:solidFill>
+                          <a:latin typeface="맑은 고딕"/>
+                        </a:rPr>
+                        <a:t>위험 영역 (라바콘·DANGER 표지) 인식</a:t>
+                      </a:r>
+                    </a:p>
+                  </a:txBody>
+                  <a:tcPr marL="54864" marR="54864" marT="27432" marB="27432">
+                    <a:solidFill>
+                      <a:srgbClr val="FFFFFF"/>
+                    </a:solidFill>
+                  </a:tcPr>
+                </a:tc>
+                <a:tc>
+                  <a:txBody>
+                    <a:bodyPr wrap="square"/>
+                    <a:lstStyle/>
+                    <a:p>
+                      <a:pPr algn="ctr"/>
+                      <a:r>
+                        <a:rPr sz="1300" b="1">
+                          <a:solidFill>
+                            <a:srgbClr val="1E2430"/>
+                          </a:solidFill>
+                          <a:latin typeface="맑은 고딕"/>
+                        </a:rPr>
+                        <a:t>20/20</a:t>
+                      </a:r>
+                      <a:r>
+                        <a:rPr sz="1300" b="0">
+                          <a:solidFill>
+                            <a:srgbClr val="1E2430"/>
+                          </a:solidFill>
+                          <a:latin typeface="맑은 고딕"/>
+                        </a:rPr>
+                        <a:t> (100%)</a:t>
+                      </a:r>
+                    </a:p>
+                  </a:txBody>
+                  <a:tcPr marL="54864" marR="54864" marT="27432" marB="27432">
+                    <a:solidFill>
+                      <a:srgbClr val="FFFFFF"/>
+                    </a:solidFill>
+                  </a:tcPr>
+                </a:tc>
+              </a:tr>
+              <a:tr h="384048">
+                <a:tc>
+                  <a:txBody>
+                    <a:bodyPr wrap="square"/>
+                    <a:lstStyle/>
+                    <a:p>
+                      <a:pPr algn="l"/>
+                      <a:r>
+                        <a:rPr sz="1300" b="0">
+                          <a:solidFill>
+                            <a:srgbClr val="1E2430"/>
+                          </a:solidFill>
+                          <a:latin typeface="맑은 고딕"/>
+                        </a:rPr>
+                        <a:t>에이전트가 판단한 위험 영역 (실제 위험 주변)</a:t>
+                      </a:r>
+                    </a:p>
+                  </a:txBody>
+                  <a:tcPr marL="54864" marR="54864" marT="27432" marB="27432">
+                    <a:solidFill>
+                      <a:srgbClr val="EEF2F8"/>
+                    </a:solidFill>
+                  </a:tcPr>
+                </a:tc>
+                <a:tc>
+                  <a:txBody>
+                    <a:bodyPr wrap="square"/>
+                    <a:lstStyle/>
+                    <a:p>
+                      <a:pPr algn="ctr"/>
+                      <a:r>
+                        <a:rPr sz="1300" b="0">
+                          <a:solidFill>
+                            <a:srgbClr val="1E2430"/>
+                          </a:solidFill>
+                          <a:latin typeface="맑은 고딕"/>
+                        </a:rPr>
+                        <a:t>43 (40)</a:t>
+                      </a:r>
+                    </a:p>
+                  </a:txBody>
+                  <a:tcPr marL="54864" marR="54864" marT="27432" marB="27432">
+                    <a:solidFill>
+                      <a:srgbClr val="EEF2F8"/>
+                    </a:solidFill>
+                  </a:tcPr>
+                </a:tc>
+              </a:tr>
+              <a:tr h="384048">
+                <a:tc>
+                  <a:txBody>
+                    <a:bodyPr wrap="square"/>
+                    <a:lstStyle/>
+                    <a:p>
+                      <a:pPr algn="l"/>
+                      <a:r>
+                        <a:rPr sz="1300" b="0">
+                          <a:solidFill>
+                            <a:srgbClr val="1E2430"/>
+                          </a:solidFill>
+                          <a:latin typeface="맑은 고딕"/>
+                        </a:rPr>
+                        <a:t>닿기 직전 사건에 음성 경고</a:t>
+                      </a:r>
+                    </a:p>
+                  </a:txBody>
+                  <a:tcPr marL="54864" marR="54864" marT="27432" marB="27432">
+                    <a:solidFill>
+                      <a:srgbClr val="FFFFFF"/>
+                    </a:solidFill>
+                  </a:tcPr>
+                </a:tc>
+                <a:tc>
+                  <a:txBody>
+                    <a:bodyPr wrap="square"/>
+                    <a:lstStyle/>
+                    <a:p>
+                      <a:pPr algn="ctr"/>
+                      <a:r>
+                        <a:rPr sz="1300" b="1">
+                          <a:solidFill>
+                            <a:srgbClr val="1E2430"/>
+                          </a:solidFill>
+                          <a:latin typeface="맑은 고딕"/>
+                        </a:rPr>
+                        <a:t>29/37</a:t>
+                      </a:r>
+                      <a:r>
+                        <a:rPr sz="1300" b="0">
+                          <a:solidFill>
+                            <a:srgbClr val="1E2430"/>
+                          </a:solidFill>
+                          <a:latin typeface="맑은 고딕"/>
+                        </a:rPr>
+                        <a:t> (78%)</a:t>
+                      </a:r>
+                    </a:p>
+                  </a:txBody>
+                  <a:tcPr marL="54864" marR="54864" marT="27432" marB="27432">
+                    <a:solidFill>
+                      <a:srgbClr val="FFFFFF"/>
+                    </a:solidFill>
+                  </a:tcPr>
+                </a:tc>
+              </a:tr>
+              <a:tr h="384048">
+                <a:tc>
+                  <a:txBody>
+                    <a:bodyPr wrap="square"/>
+                    <a:lstStyle/>
+                    <a:p>
+                      <a:pPr algn="l"/>
+                      <a:r>
+                        <a:rPr sz="1300" b="0">
+                          <a:solidFill>
+                            <a:srgbClr val="1E2430"/>
+                          </a:solidFill>
+                          <a:latin typeface="맑은 고딕"/>
+                        </a:rPr>
+                        <a:t>공구 이름 맞힘</a:t>
+                      </a:r>
+                    </a:p>
+                  </a:txBody>
+                  <a:tcPr marL="54864" marR="54864" marT="27432" marB="27432">
+                    <a:solidFill>
+                      <a:srgbClr val="EEF2F8"/>
+                    </a:solidFill>
+                  </a:tcPr>
+                </a:tc>
+                <a:tc>
+                  <a:txBody>
+                    <a:bodyPr wrap="square"/>
+                    <a:lstStyle/>
+                    <a:p>
+                      <a:pPr algn="ctr"/>
+                      <a:r>
+                        <a:rPr sz="1300" b="1">
+                          <a:solidFill>
+                            <a:srgbClr val="1E2430"/>
+                          </a:solidFill>
+                          <a:latin typeface="맑은 고딕"/>
+                        </a:rPr>
+                        <a:t>40/75</a:t>
+                      </a:r>
+                      <a:r>
+                        <a:rPr sz="1300" b="0">
+                          <a:solidFill>
+                            <a:srgbClr val="1E2430"/>
+                          </a:solidFill>
+                          <a:latin typeface="맑은 고딕"/>
+                        </a:rPr>
+                        <a:t> (53%)</a:t>
+                      </a:r>
+                    </a:p>
+                  </a:txBody>
+                  <a:tcPr marL="54864" marR="54864" marT="27432" marB="27432">
+                    <a:solidFill>
+                      <a:srgbClr val="EEF2F8"/>
+                    </a:solidFill>
+                  </a:tcPr>
+                </a:tc>
+              </a:tr>
+              <a:tr h="384048">
+                <a:tc>
+                  <a:txBody>
+                    <a:bodyPr wrap="square"/>
+                    <a:lstStyle/>
+                    <a:p>
+                      <a:pPr algn="l"/>
+                      <a:r>
+                        <a:rPr sz="1300" b="0">
+                          <a:solidFill>
+                            <a:srgbClr val="1E2430"/>
+                          </a:solidFill>
+                          <a:latin typeface="맑은 고딕"/>
+                        </a:rPr>
+                        <a:t>손동작 명령 인식 (손가락 1~5)</a:t>
+                      </a:r>
+                    </a:p>
+                  </a:txBody>
+                  <a:tcPr marL="54864" marR="54864" marT="27432" marB="27432">
+                    <a:solidFill>
+                      <a:srgbClr val="FFFFFF"/>
+                    </a:solidFill>
+                  </a:tcPr>
+                </a:tc>
+                <a:tc>
+                  <a:txBody>
+                    <a:bodyPr wrap="square"/>
+                    <a:lstStyle/>
+                    <a:p>
+                      <a:pPr algn="ctr"/>
+                      <a:r>
+                        <a:rPr sz="1300" b="1">
+                          <a:solidFill>
+                            <a:srgbClr val="1E2430"/>
+                          </a:solidFill>
+                          <a:latin typeface="맑은 고딕"/>
+                        </a:rPr>
+                        <a:t>35/40</a:t>
+                      </a:r>
+                      <a:r>
+                        <a:rPr sz="1300" b="0">
+                          <a:solidFill>
+                            <a:srgbClr val="1E2430"/>
+                          </a:solidFill>
+                          <a:latin typeface="맑은 고딕"/>
+                        </a:rPr>
+                        <a:t> (88%)</a:t>
                       </a:r>
                     </a:p>
                   </a:txBody>
@@ -6957,1417 +7601,14 @@
       </p:graphicFrame>
       <p:sp>
         <p:nvSpPr>
-          <p:cNvPr id="4" name="TextBox 3"/>
-          <p:cNvSpPr txBox="1"/>
-          <p:nvPr/>
-        </p:nvSpPr>
-        <p:spPr>
-          <a:xfrm>
-            <a:off x="457200" y="4206240"/>
-            <a:ext cx="6766560" cy="1920240"/>
-          </a:xfrm>
-          <a:prstGeom prst="rect">
-            <a:avLst/>
-          </a:prstGeom>
-          <a:noFill/>
-        </p:spPr>
-        <p:txBody>
-          <a:bodyPr wrap="square" lIns="109728" rIns="109728" tIns="54864" bIns="54864">
-            <a:spAutoFit/>
-          </a:bodyPr>
-          <a:lstStyle/>
-          <a:p>
-            <a:pPr>
-              <a:spcAft>
-                <a:spcPts val="400"/>
-              </a:spcAft>
-            </a:pPr>
-            <a:r>
-              <a:rPr sz="1500" b="1">
-                <a:solidFill>
-                  <a:srgbClr val="284E92"/>
-                </a:solidFill>
-                <a:latin typeface="맑은 고딕"/>
-              </a:rPr>
-              <a:t>재확인과 점검표가 바디캠이 놓친 물체를 채움</a:t>
-            </a:r>
-          </a:p>
-          <a:p>
-            <a:pPr>
-              <a:spcAft>
-                <a:spcPts val="400"/>
-              </a:spcAft>
-            </a:pPr>
-            <a:r>
-              <a:rPr sz="1300" b="0">
-                <a:solidFill>
-                  <a:srgbClr val="1E2430"/>
-                </a:solidFill>
-                <a:latin typeface="맑은 고딕"/>
-              </a:rPr>
-              <a:t>• 재확인 105건 실행: 찾음 96, 판정 고침 2, 다른 CCTV 재시도 5</a:t>
-            </a:r>
-          </a:p>
-          <a:p>
-            <a:pPr>
-              <a:spcAft>
-                <a:spcPts val="400"/>
-              </a:spcAft>
-            </a:pPr>
-            <a:r>
-              <a:rPr sz="1300" b="0">
-                <a:solidFill>
-                  <a:srgbClr val="1E2430"/>
-                </a:solidFill>
-                <a:latin typeface="맑은 고딕"/>
-              </a:rPr>
-              <a:t>• 작업대 위 공구, 랙 끝 소화기처럼 경로에서 먼 물체를 CCTV 확대로 확인</a:t>
-            </a:r>
-          </a:p>
-          <a:p>
-            <a:pPr>
-              <a:spcAft>
-                <a:spcPts val="400"/>
-              </a:spcAft>
-            </a:pPr>
-            <a:r>
-              <a:rPr sz="1300" b="0">
-                <a:solidFill>
-                  <a:srgbClr val="1E2430"/>
-                </a:solidFill>
-                <a:latin typeface="맑은 고딕"/>
-              </a:rPr>
-              <a:t>• 확정 못 한 것은 숨기지 않고 '현장 확인' 으로 사람에게</a:t>
-            </a:r>
-          </a:p>
-        </p:txBody>
-      </p:sp>
-      <p:graphicFrame>
-        <p:nvGraphicFramePr>
-          <p:cNvPr id="5" name="Table 4"/>
-          <p:cNvGraphicFramePr>
-            <a:graphicFrameLocks noGrp="1"/>
-          </p:cNvGraphicFramePr>
-          <p:nvPr/>
-        </p:nvGraphicFramePr>
-        <p:xfrm>
-          <a:off x="7589520" y="1234440"/>
-          <a:ext cx="4114800" cy="2514600"/>
-        </p:xfrm>
-        <a:graphic>
-          <a:graphicData uri="http://schemas.openxmlformats.org/drawingml/2006/table">
-            <a:tbl>
-              <a:tblPr firstRow="1" bandRow="1">
-                <a:tableStyleId>{5C22544A-7EE6-4342-B048-85BDC9FD1C3A}</a:tableStyleId>
-              </a:tblPr>
-              <a:tblGrid>
-                <a:gridCol w="731520"/>
-                <a:gridCol w="914400"/>
-                <a:gridCol w="914400"/>
-                <a:gridCol w="777240"/>
-                <a:gridCol w="777240"/>
-              </a:tblGrid>
-              <a:tr h="228600">
-                <a:tc>
-                  <a:txBody>
-                    <a:bodyPr wrap="square"/>
-                    <a:lstStyle/>
-                    <a:p>
-                      <a:pPr algn="ctr"/>
-                      <a:r>
-                        <a:rPr sz="1000" b="1">
-                          <a:solidFill>
-                            <a:srgbClr val="FFFFFF"/>
-                          </a:solidFill>
-                          <a:latin typeface="맑은 고딕"/>
-                        </a:rPr>
-                        <a:t>시드</a:t>
-                      </a:r>
-                    </a:p>
-                  </a:txBody>
-                  <a:tcPr marL="54864" marR="54864" marT="27432" marB="27432">
-                    <a:solidFill>
-                      <a:srgbClr val="284E92"/>
-                    </a:solidFill>
-                  </a:tcPr>
-                </a:tc>
-                <a:tc>
-                  <a:txBody>
-                    <a:bodyPr wrap="square"/>
-                    <a:lstStyle/>
-                    <a:p>
-                      <a:pPr algn="ctr"/>
-                      <a:r>
-                        <a:rPr sz="1000" b="1">
-                          <a:solidFill>
-                            <a:srgbClr val="FFFFFF"/>
-                          </a:solidFill>
-                          <a:latin typeface="맑은 고딕"/>
-                        </a:rPr>
-                        <a:t>위험</a:t>
-                      </a:r>
-                    </a:p>
-                  </a:txBody>
-                  <a:tcPr marL="54864" marR="54864" marT="27432" marB="27432">
-                    <a:solidFill>
-                      <a:srgbClr val="284E92"/>
-                    </a:solidFill>
-                  </a:tcPr>
-                </a:tc>
-                <a:tc>
-                  <a:txBody>
-                    <a:bodyPr wrap="square"/>
-                    <a:lstStyle/>
-                    <a:p>
-                      <a:pPr algn="ctr"/>
-                      <a:r>
-                        <a:rPr sz="1000" b="1">
-                          <a:solidFill>
-                            <a:srgbClr val="FFFFFF"/>
-                          </a:solidFill>
-                          <a:latin typeface="맑은 고딕"/>
-                        </a:rPr>
-                        <a:t>안전</a:t>
-                      </a:r>
-                    </a:p>
-                  </a:txBody>
-                  <a:tcPr marL="54864" marR="54864" marT="27432" marB="27432">
-                    <a:solidFill>
-                      <a:srgbClr val="284E92"/>
-                    </a:solidFill>
-                  </a:tcPr>
-                </a:tc>
-                <a:tc>
-                  <a:txBody>
-                    <a:bodyPr wrap="square"/>
-                    <a:lstStyle/>
-                    <a:p>
-                      <a:pPr algn="ctr"/>
-                      <a:r>
-                        <a:rPr sz="1000" b="1">
-                          <a:solidFill>
-                            <a:srgbClr val="FFFFFF"/>
-                          </a:solidFill>
-                          <a:latin typeface="맑은 고딕"/>
-                        </a:rPr>
-                        <a:t>거꾸로</a:t>
-                      </a:r>
-                    </a:p>
-                  </a:txBody>
-                  <a:tcPr marL="54864" marR="54864" marT="27432" marB="27432">
-                    <a:solidFill>
-                      <a:srgbClr val="284E92"/>
-                    </a:solidFill>
-                  </a:tcPr>
-                </a:tc>
-                <a:tc>
-                  <a:txBody>
-                    <a:bodyPr wrap="square"/>
-                    <a:lstStyle/>
-                    <a:p>
-                      <a:pPr algn="ctr"/>
-                      <a:r>
-                        <a:rPr sz="1000" b="1">
-                          <a:solidFill>
-                            <a:srgbClr val="FFFFFF"/>
-                          </a:solidFill>
-                          <a:latin typeface="맑은 고딕"/>
-                        </a:rPr>
-                        <a:t>재확인</a:t>
-                      </a:r>
-                    </a:p>
-                  </a:txBody>
-                  <a:tcPr marL="54864" marR="54864" marT="27432" marB="27432">
-                    <a:solidFill>
-                      <a:srgbClr val="284E92"/>
-                    </a:solidFill>
-                  </a:tcPr>
-                </a:tc>
-              </a:tr>
-              <a:tr h="228600">
-                <a:tc>
-                  <a:txBody>
-                    <a:bodyPr wrap="square"/>
-                    <a:lstStyle/>
-                    <a:p>
-                      <a:pPr algn="l"/>
-                      <a:r>
-                        <a:rPr sz="1000" b="0">
-                          <a:solidFill>
-                            <a:srgbClr val="1E2430"/>
-                          </a:solidFill>
-                          <a:latin typeface="맑은 고딕"/>
-                        </a:rPr>
-                        <a:t>0</a:t>
-                      </a:r>
-                    </a:p>
-                  </a:txBody>
-                  <a:tcPr marL="54864" marR="54864" marT="27432" marB="27432">
-                    <a:solidFill>
-                      <a:srgbClr val="FFFFFF"/>
-                    </a:solidFill>
-                  </a:tcPr>
-                </a:tc>
-                <a:tc>
-                  <a:txBody>
-                    <a:bodyPr wrap="square"/>
-                    <a:lstStyle/>
-                    <a:p>
-                      <a:pPr algn="ctr"/>
-                      <a:r>
-                        <a:rPr sz="1000" b="0">
-                          <a:solidFill>
-                            <a:srgbClr val="1E2430"/>
-                          </a:solidFill>
-                          <a:latin typeface="맑은 고딕"/>
-                        </a:rPr>
-                        <a:t>4/6</a:t>
-                      </a:r>
-                    </a:p>
-                  </a:txBody>
-                  <a:tcPr marL="54864" marR="54864" marT="27432" marB="27432">
-                    <a:solidFill>
-                      <a:srgbClr val="FFFFFF"/>
-                    </a:solidFill>
-                  </a:tcPr>
-                </a:tc>
-                <a:tc>
-                  <a:txBody>
-                    <a:bodyPr wrap="square"/>
-                    <a:lstStyle/>
-                    <a:p>
-                      <a:pPr algn="ctr"/>
-                      <a:r>
-                        <a:rPr sz="1000" b="0">
-                          <a:solidFill>
-                            <a:srgbClr val="1E2430"/>
-                          </a:solidFill>
-                          <a:latin typeface="맑은 고딕"/>
-                        </a:rPr>
-                        <a:t>12/12</a:t>
-                      </a:r>
-                    </a:p>
-                  </a:txBody>
-                  <a:tcPr marL="54864" marR="54864" marT="27432" marB="27432">
-                    <a:solidFill>
-                      <a:srgbClr val="FFFFFF"/>
-                    </a:solidFill>
-                  </a:tcPr>
-                </a:tc>
-                <a:tc>
-                  <a:txBody>
-                    <a:bodyPr wrap="square"/>
-                    <a:lstStyle/>
-                    <a:p>
-                      <a:pPr algn="ctr"/>
-                      <a:r>
-                        <a:rPr sz="1000" b="0">
-                          <a:solidFill>
-                            <a:srgbClr val="1E2430"/>
-                          </a:solidFill>
-                          <a:latin typeface="맑은 고딕"/>
-                        </a:rPr>
-                        <a:t>0</a:t>
-                      </a:r>
-                    </a:p>
-                  </a:txBody>
-                  <a:tcPr marL="54864" marR="54864" marT="27432" marB="27432">
-                    <a:solidFill>
-                      <a:srgbClr val="FFFFFF"/>
-                    </a:solidFill>
-                  </a:tcPr>
-                </a:tc>
-                <a:tc>
-                  <a:txBody>
-                    <a:bodyPr wrap="square"/>
-                    <a:lstStyle/>
-                    <a:p>
-                      <a:pPr algn="ctr"/>
-                      <a:r>
-                        <a:rPr sz="1000" b="0">
-                          <a:solidFill>
-                            <a:srgbClr val="1E2430"/>
-                          </a:solidFill>
-                          <a:latin typeface="맑은 고딕"/>
-                        </a:rPr>
-                        <a:t>12</a:t>
-                      </a:r>
-                    </a:p>
-                  </a:txBody>
-                  <a:tcPr marL="54864" marR="54864" marT="27432" marB="27432">
-                    <a:solidFill>
-                      <a:srgbClr val="FFFFFF"/>
-                    </a:solidFill>
-                  </a:tcPr>
-                </a:tc>
-              </a:tr>
-              <a:tr h="228600">
-                <a:tc>
-                  <a:txBody>
-                    <a:bodyPr wrap="square"/>
-                    <a:lstStyle/>
-                    <a:p>
-                      <a:pPr algn="l"/>
-                      <a:r>
-                        <a:rPr sz="1000" b="0">
-                          <a:solidFill>
-                            <a:srgbClr val="1E2430"/>
-                          </a:solidFill>
-                          <a:latin typeface="맑은 고딕"/>
-                        </a:rPr>
-                        <a:t>1</a:t>
-                      </a:r>
-                    </a:p>
-                  </a:txBody>
-                  <a:tcPr marL="54864" marR="54864" marT="27432" marB="27432">
-                    <a:solidFill>
-                      <a:srgbClr val="EEF2F8"/>
-                    </a:solidFill>
-                  </a:tcPr>
-                </a:tc>
-                <a:tc>
-                  <a:txBody>
-                    <a:bodyPr wrap="square"/>
-                    <a:lstStyle/>
-                    <a:p>
-                      <a:pPr algn="ctr"/>
-                      <a:r>
-                        <a:rPr sz="1000" b="0">
-                          <a:solidFill>
-                            <a:srgbClr val="1E2430"/>
-                          </a:solidFill>
-                          <a:latin typeface="맑은 고딕"/>
-                        </a:rPr>
-                        <a:t>9/9</a:t>
-                      </a:r>
-                    </a:p>
-                  </a:txBody>
-                  <a:tcPr marL="54864" marR="54864" marT="27432" marB="27432">
-                    <a:solidFill>
-                      <a:srgbClr val="EEF2F8"/>
-                    </a:solidFill>
-                  </a:tcPr>
-                </a:tc>
-                <a:tc>
-                  <a:txBody>
-                    <a:bodyPr wrap="square"/>
-                    <a:lstStyle/>
-                    <a:p>
-                      <a:pPr algn="ctr"/>
-                      <a:r>
-                        <a:rPr sz="1000" b="0">
-                          <a:solidFill>
-                            <a:srgbClr val="1E2430"/>
-                          </a:solidFill>
-                          <a:latin typeface="맑은 고딕"/>
-                        </a:rPr>
-                        <a:t>8/9</a:t>
-                      </a:r>
-                    </a:p>
-                  </a:txBody>
-                  <a:tcPr marL="54864" marR="54864" marT="27432" marB="27432">
-                    <a:solidFill>
-                      <a:srgbClr val="EEF2F8"/>
-                    </a:solidFill>
-                  </a:tcPr>
-                </a:tc>
-                <a:tc>
-                  <a:txBody>
-                    <a:bodyPr wrap="square"/>
-                    <a:lstStyle/>
-                    <a:p>
-                      <a:pPr algn="ctr"/>
-                      <a:r>
-                        <a:rPr sz="1000" b="0">
-                          <a:solidFill>
-                            <a:srgbClr val="1E2430"/>
-                          </a:solidFill>
-                          <a:latin typeface="맑은 고딕"/>
-                        </a:rPr>
-                        <a:t>0</a:t>
-                      </a:r>
-                    </a:p>
-                  </a:txBody>
-                  <a:tcPr marL="54864" marR="54864" marT="27432" marB="27432">
-                    <a:solidFill>
-                      <a:srgbClr val="EEF2F8"/>
-                    </a:solidFill>
-                  </a:tcPr>
-                </a:tc>
-                <a:tc>
-                  <a:txBody>
-                    <a:bodyPr wrap="square"/>
-                    <a:lstStyle/>
-                    <a:p>
-                      <a:pPr algn="ctr"/>
-                      <a:r>
-                        <a:rPr sz="1000" b="0">
-                          <a:solidFill>
-                            <a:srgbClr val="1E2430"/>
-                          </a:solidFill>
-                          <a:latin typeface="맑은 고딕"/>
-                        </a:rPr>
-                        <a:t>9</a:t>
-                      </a:r>
-                    </a:p>
-                  </a:txBody>
-                  <a:tcPr marL="54864" marR="54864" marT="27432" marB="27432">
-                    <a:solidFill>
-                      <a:srgbClr val="EEF2F8"/>
-                    </a:solidFill>
-                  </a:tcPr>
-                </a:tc>
-              </a:tr>
-              <a:tr h="228600">
-                <a:tc>
-                  <a:txBody>
-                    <a:bodyPr wrap="square"/>
-                    <a:lstStyle/>
-                    <a:p>
-                      <a:pPr algn="l"/>
-                      <a:r>
-                        <a:rPr sz="1000" b="0">
-                          <a:solidFill>
-                            <a:srgbClr val="1E2430"/>
-                          </a:solidFill>
-                          <a:latin typeface="맑은 고딕"/>
-                        </a:rPr>
-                        <a:t>2</a:t>
-                      </a:r>
-                    </a:p>
-                  </a:txBody>
-                  <a:tcPr marL="54864" marR="54864" marT="27432" marB="27432">
-                    <a:solidFill>
-                      <a:srgbClr val="FFFFFF"/>
-                    </a:solidFill>
-                  </a:tcPr>
-                </a:tc>
-                <a:tc>
-                  <a:txBody>
-                    <a:bodyPr wrap="square"/>
-                    <a:lstStyle/>
-                    <a:p>
-                      <a:pPr algn="ctr"/>
-                      <a:r>
-                        <a:rPr sz="1000" b="0">
-                          <a:solidFill>
-                            <a:srgbClr val="1E2430"/>
-                          </a:solidFill>
-                          <a:latin typeface="맑은 고딕"/>
-                        </a:rPr>
-                        <a:t>4/5</a:t>
-                      </a:r>
-                    </a:p>
-                  </a:txBody>
-                  <a:tcPr marL="54864" marR="54864" marT="27432" marB="27432">
-                    <a:solidFill>
-                      <a:srgbClr val="FFFFFF"/>
-                    </a:solidFill>
-                  </a:tcPr>
-                </a:tc>
-                <a:tc>
-                  <a:txBody>
-                    <a:bodyPr wrap="square"/>
-                    <a:lstStyle/>
-                    <a:p>
-                      <a:pPr algn="ctr"/>
-                      <a:r>
-                        <a:rPr sz="1000" b="0">
-                          <a:solidFill>
-                            <a:srgbClr val="1E2430"/>
-                          </a:solidFill>
-                          <a:latin typeface="맑은 고딕"/>
-                        </a:rPr>
-                        <a:t>11/12</a:t>
-                      </a:r>
-                    </a:p>
-                  </a:txBody>
-                  <a:tcPr marL="54864" marR="54864" marT="27432" marB="27432">
-                    <a:solidFill>
-                      <a:srgbClr val="FFFFFF"/>
-                    </a:solidFill>
-                  </a:tcPr>
-                </a:tc>
-                <a:tc>
-                  <a:txBody>
-                    <a:bodyPr wrap="square"/>
-                    <a:lstStyle/>
-                    <a:p>
-                      <a:pPr algn="ctr"/>
-                      <a:r>
-                        <a:rPr sz="1000" b="0">
-                          <a:solidFill>
-                            <a:srgbClr val="1E2430"/>
-                          </a:solidFill>
-                          <a:latin typeface="맑은 고딕"/>
-                        </a:rPr>
-                        <a:t>0</a:t>
-                      </a:r>
-                    </a:p>
-                  </a:txBody>
-                  <a:tcPr marL="54864" marR="54864" marT="27432" marB="27432">
-                    <a:solidFill>
-                      <a:srgbClr val="FFFFFF"/>
-                    </a:solidFill>
-                  </a:tcPr>
-                </a:tc>
-                <a:tc>
-                  <a:txBody>
-                    <a:bodyPr wrap="square"/>
-                    <a:lstStyle/>
-                    <a:p>
-                      <a:pPr algn="ctr"/>
-                      <a:r>
-                        <a:rPr sz="1000" b="0">
-                          <a:solidFill>
-                            <a:srgbClr val="1E2430"/>
-                          </a:solidFill>
-                          <a:latin typeface="맑은 고딕"/>
-                        </a:rPr>
-                        <a:t>8</a:t>
-                      </a:r>
-                    </a:p>
-                  </a:txBody>
-                  <a:tcPr marL="54864" marR="54864" marT="27432" marB="27432">
-                    <a:solidFill>
-                      <a:srgbClr val="FFFFFF"/>
-                    </a:solidFill>
-                  </a:tcPr>
-                </a:tc>
-              </a:tr>
-              <a:tr h="228600">
-                <a:tc>
-                  <a:txBody>
-                    <a:bodyPr wrap="square"/>
-                    <a:lstStyle/>
-                    <a:p>
-                      <a:pPr algn="l"/>
-                      <a:r>
-                        <a:rPr sz="1000" b="0">
-                          <a:solidFill>
-                            <a:srgbClr val="1E2430"/>
-                          </a:solidFill>
-                          <a:latin typeface="맑은 고딕"/>
-                        </a:rPr>
-                        <a:t>3</a:t>
-                      </a:r>
-                    </a:p>
-                  </a:txBody>
-                  <a:tcPr marL="54864" marR="54864" marT="27432" marB="27432">
-                    <a:solidFill>
-                      <a:srgbClr val="EEF2F8"/>
-                    </a:solidFill>
-                  </a:tcPr>
-                </a:tc>
-                <a:tc>
-                  <a:txBody>
-                    <a:bodyPr wrap="square"/>
-                    <a:lstStyle/>
-                    <a:p>
-                      <a:pPr algn="ctr"/>
-                      <a:r>
-                        <a:rPr sz="1000" b="0">
-                          <a:solidFill>
-                            <a:srgbClr val="1E2430"/>
-                          </a:solidFill>
-                          <a:latin typeface="맑은 고딕"/>
-                        </a:rPr>
-                        <a:t>7/9</a:t>
-                      </a:r>
-                    </a:p>
-                  </a:txBody>
-                  <a:tcPr marL="54864" marR="54864" marT="27432" marB="27432">
-                    <a:solidFill>
-                      <a:srgbClr val="EEF2F8"/>
-                    </a:solidFill>
-                  </a:tcPr>
-                </a:tc>
-                <a:tc>
-                  <a:txBody>
-                    <a:bodyPr wrap="square"/>
-                    <a:lstStyle/>
-                    <a:p>
-                      <a:pPr algn="ctr"/>
-                      <a:r>
-                        <a:rPr sz="1000" b="0">
-                          <a:solidFill>
-                            <a:srgbClr val="1E2430"/>
-                          </a:solidFill>
-                          <a:latin typeface="맑은 고딕"/>
-                        </a:rPr>
-                        <a:t>8/8</a:t>
-                      </a:r>
-                    </a:p>
-                  </a:txBody>
-                  <a:tcPr marL="54864" marR="54864" marT="27432" marB="27432">
-                    <a:solidFill>
-                      <a:srgbClr val="EEF2F8"/>
-                    </a:solidFill>
-                  </a:tcPr>
-                </a:tc>
-                <a:tc>
-                  <a:txBody>
-                    <a:bodyPr wrap="square"/>
-                    <a:lstStyle/>
-                    <a:p>
-                      <a:pPr algn="ctr"/>
-                      <a:r>
-                        <a:rPr sz="1000" b="0">
-                          <a:solidFill>
-                            <a:srgbClr val="1E2430"/>
-                          </a:solidFill>
-                          <a:latin typeface="맑은 고딕"/>
-                        </a:rPr>
-                        <a:t>0</a:t>
-                      </a:r>
-                    </a:p>
-                  </a:txBody>
-                  <a:tcPr marL="54864" marR="54864" marT="27432" marB="27432">
-                    <a:solidFill>
-                      <a:srgbClr val="EEF2F8"/>
-                    </a:solidFill>
-                  </a:tcPr>
-                </a:tc>
-                <a:tc>
-                  <a:txBody>
-                    <a:bodyPr wrap="square"/>
-                    <a:lstStyle/>
-                    <a:p>
-                      <a:pPr algn="ctr"/>
-                      <a:r>
-                        <a:rPr sz="1000" b="0">
-                          <a:solidFill>
-                            <a:srgbClr val="1E2430"/>
-                          </a:solidFill>
-                          <a:latin typeface="맑은 고딕"/>
-                        </a:rPr>
-                        <a:t>9</a:t>
-                      </a:r>
-                    </a:p>
-                  </a:txBody>
-                  <a:tcPr marL="54864" marR="54864" marT="27432" marB="27432">
-                    <a:solidFill>
-                      <a:srgbClr val="EEF2F8"/>
-                    </a:solidFill>
-                  </a:tcPr>
-                </a:tc>
-              </a:tr>
-              <a:tr h="228600">
-                <a:tc>
-                  <a:txBody>
-                    <a:bodyPr wrap="square"/>
-                    <a:lstStyle/>
-                    <a:p>
-                      <a:pPr algn="l"/>
-                      <a:r>
-                        <a:rPr sz="1000" b="0">
-                          <a:solidFill>
-                            <a:srgbClr val="1E2430"/>
-                          </a:solidFill>
-                          <a:latin typeface="맑은 고딕"/>
-                        </a:rPr>
-                        <a:t>4</a:t>
-                      </a:r>
-                    </a:p>
-                  </a:txBody>
-                  <a:tcPr marL="54864" marR="54864" marT="27432" marB="27432">
-                    <a:solidFill>
-                      <a:srgbClr val="FFFFFF"/>
-                    </a:solidFill>
-                  </a:tcPr>
-                </a:tc>
-                <a:tc>
-                  <a:txBody>
-                    <a:bodyPr wrap="square"/>
-                    <a:lstStyle/>
-                    <a:p>
-                      <a:pPr algn="ctr"/>
-                      <a:r>
-                        <a:rPr sz="1000" b="0">
-                          <a:solidFill>
-                            <a:srgbClr val="1E2430"/>
-                          </a:solidFill>
-                          <a:latin typeface="맑은 고딕"/>
-                        </a:rPr>
-                        <a:t>7/9</a:t>
-                      </a:r>
-                    </a:p>
-                  </a:txBody>
-                  <a:tcPr marL="54864" marR="54864" marT="27432" marB="27432">
-                    <a:solidFill>
-                      <a:srgbClr val="FFFFFF"/>
-                    </a:solidFill>
-                  </a:tcPr>
-                </a:tc>
-                <a:tc>
-                  <a:txBody>
-                    <a:bodyPr wrap="square"/>
-                    <a:lstStyle/>
-                    <a:p>
-                      <a:pPr algn="ctr"/>
-                      <a:r>
-                        <a:rPr sz="1000" b="0">
-                          <a:solidFill>
-                            <a:srgbClr val="1E2430"/>
-                          </a:solidFill>
-                          <a:latin typeface="맑은 고딕"/>
-                        </a:rPr>
-                        <a:t>9/9</a:t>
-                      </a:r>
-                    </a:p>
-                  </a:txBody>
-                  <a:tcPr marL="54864" marR="54864" marT="27432" marB="27432">
-                    <a:solidFill>
-                      <a:srgbClr val="FFFFFF"/>
-                    </a:solidFill>
-                  </a:tcPr>
-                </a:tc>
-                <a:tc>
-                  <a:txBody>
-                    <a:bodyPr wrap="square"/>
-                    <a:lstStyle/>
-                    <a:p>
-                      <a:pPr algn="ctr"/>
-                      <a:r>
-                        <a:rPr sz="1000" b="0">
-                          <a:solidFill>
-                            <a:srgbClr val="1E2430"/>
-                          </a:solidFill>
-                          <a:latin typeface="맑은 고딕"/>
-                        </a:rPr>
-                        <a:t>0</a:t>
-                      </a:r>
-                    </a:p>
-                  </a:txBody>
-                  <a:tcPr marL="54864" marR="54864" marT="27432" marB="27432">
-                    <a:solidFill>
-                      <a:srgbClr val="FFFFFF"/>
-                    </a:solidFill>
-                  </a:tcPr>
-                </a:tc>
-                <a:tc>
-                  <a:txBody>
-                    <a:bodyPr wrap="square"/>
-                    <a:lstStyle/>
-                    <a:p>
-                      <a:pPr algn="ctr"/>
-                      <a:r>
-                        <a:rPr sz="1000" b="0">
-                          <a:solidFill>
-                            <a:srgbClr val="1E2430"/>
-                          </a:solidFill>
-                          <a:latin typeface="맑은 고딕"/>
-                        </a:rPr>
-                        <a:t>13</a:t>
-                      </a:r>
-                    </a:p>
-                  </a:txBody>
-                  <a:tcPr marL="54864" marR="54864" marT="27432" marB="27432">
-                    <a:solidFill>
-                      <a:srgbClr val="FFFFFF"/>
-                    </a:solidFill>
-                  </a:tcPr>
-                </a:tc>
-              </a:tr>
-              <a:tr h="228600">
-                <a:tc>
-                  <a:txBody>
-                    <a:bodyPr wrap="square"/>
-                    <a:lstStyle/>
-                    <a:p>
-                      <a:pPr algn="l"/>
-                      <a:r>
-                        <a:rPr sz="1000" b="0">
-                          <a:solidFill>
-                            <a:srgbClr val="1E2430"/>
-                          </a:solidFill>
-                          <a:latin typeface="맑은 고딕"/>
-                        </a:rPr>
-                        <a:t>5</a:t>
-                      </a:r>
-                    </a:p>
-                  </a:txBody>
-                  <a:tcPr marL="54864" marR="54864" marT="27432" marB="27432">
-                    <a:solidFill>
-                      <a:srgbClr val="EEF2F8"/>
-                    </a:solidFill>
-                  </a:tcPr>
-                </a:tc>
-                <a:tc>
-                  <a:txBody>
-                    <a:bodyPr wrap="square"/>
-                    <a:lstStyle/>
-                    <a:p>
-                      <a:pPr algn="ctr"/>
-                      <a:r>
-                        <a:rPr sz="1000" b="0">
-                          <a:solidFill>
-                            <a:srgbClr val="1E2430"/>
-                          </a:solidFill>
-                          <a:latin typeface="맑은 고딕"/>
-                        </a:rPr>
-                        <a:t>5/7</a:t>
-                      </a:r>
-                    </a:p>
-                  </a:txBody>
-                  <a:tcPr marL="54864" marR="54864" marT="27432" marB="27432">
-                    <a:solidFill>
-                      <a:srgbClr val="EEF2F8"/>
-                    </a:solidFill>
-                  </a:tcPr>
-                </a:tc>
-                <a:tc>
-                  <a:txBody>
-                    <a:bodyPr wrap="square"/>
-                    <a:lstStyle/>
-                    <a:p>
-                      <a:pPr algn="ctr"/>
-                      <a:r>
-                        <a:rPr sz="1000" b="0">
-                          <a:solidFill>
-                            <a:srgbClr val="1E2430"/>
-                          </a:solidFill>
-                          <a:latin typeface="맑은 고딕"/>
-                        </a:rPr>
-                        <a:t>10/10</a:t>
-                      </a:r>
-                    </a:p>
-                  </a:txBody>
-                  <a:tcPr marL="54864" marR="54864" marT="27432" marB="27432">
-                    <a:solidFill>
-                      <a:srgbClr val="EEF2F8"/>
-                    </a:solidFill>
-                  </a:tcPr>
-                </a:tc>
-                <a:tc>
-                  <a:txBody>
-                    <a:bodyPr wrap="square"/>
-                    <a:lstStyle/>
-                    <a:p>
-                      <a:pPr algn="ctr"/>
-                      <a:r>
-                        <a:rPr sz="1000" b="0">
-                          <a:solidFill>
-                            <a:srgbClr val="1E2430"/>
-                          </a:solidFill>
-                          <a:latin typeface="맑은 고딕"/>
-                        </a:rPr>
-                        <a:t>0</a:t>
-                      </a:r>
-                    </a:p>
-                  </a:txBody>
-                  <a:tcPr marL="54864" marR="54864" marT="27432" marB="27432">
-                    <a:solidFill>
-                      <a:srgbClr val="EEF2F8"/>
-                    </a:solidFill>
-                  </a:tcPr>
-                </a:tc>
-                <a:tc>
-                  <a:txBody>
-                    <a:bodyPr wrap="square"/>
-                    <a:lstStyle/>
-                    <a:p>
-                      <a:pPr algn="ctr"/>
-                      <a:r>
-                        <a:rPr sz="1000" b="0">
-                          <a:solidFill>
-                            <a:srgbClr val="1E2430"/>
-                          </a:solidFill>
-                          <a:latin typeface="맑은 고딕"/>
-                        </a:rPr>
-                        <a:t>12</a:t>
-                      </a:r>
-                    </a:p>
-                  </a:txBody>
-                  <a:tcPr marL="54864" marR="54864" marT="27432" marB="27432">
-                    <a:solidFill>
-                      <a:srgbClr val="EEF2F8"/>
-                    </a:solidFill>
-                  </a:tcPr>
-                </a:tc>
-              </a:tr>
-              <a:tr h="228600">
-                <a:tc>
-                  <a:txBody>
-                    <a:bodyPr wrap="square"/>
-                    <a:lstStyle/>
-                    <a:p>
-                      <a:pPr algn="l"/>
-                      <a:r>
-                        <a:rPr sz="1000" b="0">
-                          <a:solidFill>
-                            <a:srgbClr val="1E2430"/>
-                          </a:solidFill>
-                          <a:latin typeface="맑은 고딕"/>
-                        </a:rPr>
-                        <a:t>6</a:t>
-                      </a:r>
-                    </a:p>
-                  </a:txBody>
-                  <a:tcPr marL="54864" marR="54864" marT="27432" marB="27432">
-                    <a:solidFill>
-                      <a:srgbClr val="FFFFFF"/>
-                    </a:solidFill>
-                  </a:tcPr>
-                </a:tc>
-                <a:tc>
-                  <a:txBody>
-                    <a:bodyPr wrap="square"/>
-                    <a:lstStyle/>
-                    <a:p>
-                      <a:pPr algn="ctr"/>
-                      <a:r>
-                        <a:rPr sz="1000" b="0">
-                          <a:solidFill>
-                            <a:srgbClr val="1E2430"/>
-                          </a:solidFill>
-                          <a:latin typeface="맑은 고딕"/>
-                        </a:rPr>
-                        <a:t>4/6</a:t>
-                      </a:r>
-                    </a:p>
-                  </a:txBody>
-                  <a:tcPr marL="54864" marR="54864" marT="27432" marB="27432">
-                    <a:solidFill>
-                      <a:srgbClr val="FFFFFF"/>
-                    </a:solidFill>
-                  </a:tcPr>
-                </a:tc>
-                <a:tc>
-                  <a:txBody>
-                    <a:bodyPr wrap="square"/>
-                    <a:lstStyle/>
-                    <a:p>
-                      <a:pPr algn="ctr"/>
-                      <a:r>
-                        <a:rPr sz="1000" b="0">
-                          <a:solidFill>
-                            <a:srgbClr val="1E2430"/>
-                          </a:solidFill>
-                          <a:latin typeface="맑은 고딕"/>
-                        </a:rPr>
-                        <a:t>11/11</a:t>
-                      </a:r>
-                    </a:p>
-                  </a:txBody>
-                  <a:tcPr marL="54864" marR="54864" marT="27432" marB="27432">
-                    <a:solidFill>
-                      <a:srgbClr val="FFFFFF"/>
-                    </a:solidFill>
-                  </a:tcPr>
-                </a:tc>
-                <a:tc>
-                  <a:txBody>
-                    <a:bodyPr wrap="square"/>
-                    <a:lstStyle/>
-                    <a:p>
-                      <a:pPr algn="ctr"/>
-                      <a:r>
-                        <a:rPr sz="1000" b="0">
-                          <a:solidFill>
-                            <a:srgbClr val="1E2430"/>
-                          </a:solidFill>
-                          <a:latin typeface="맑은 고딕"/>
-                        </a:rPr>
-                        <a:t>0</a:t>
-                      </a:r>
-                    </a:p>
-                  </a:txBody>
-                  <a:tcPr marL="54864" marR="54864" marT="27432" marB="27432">
-                    <a:solidFill>
-                      <a:srgbClr val="FFFFFF"/>
-                    </a:solidFill>
-                  </a:tcPr>
-                </a:tc>
-                <a:tc>
-                  <a:txBody>
-                    <a:bodyPr wrap="square"/>
-                    <a:lstStyle/>
-                    <a:p>
-                      <a:pPr algn="ctr"/>
-                      <a:r>
-                        <a:rPr sz="1000" b="0">
-                          <a:solidFill>
-                            <a:srgbClr val="1E2430"/>
-                          </a:solidFill>
-                          <a:latin typeface="맑은 고딕"/>
-                        </a:rPr>
-                        <a:t>9</a:t>
-                      </a:r>
-                    </a:p>
-                  </a:txBody>
-                  <a:tcPr marL="54864" marR="54864" marT="27432" marB="27432">
-                    <a:solidFill>
-                      <a:srgbClr val="FFFFFF"/>
-                    </a:solidFill>
-                  </a:tcPr>
-                </a:tc>
-              </a:tr>
-              <a:tr h="228600">
-                <a:tc>
-                  <a:txBody>
-                    <a:bodyPr wrap="square"/>
-                    <a:lstStyle/>
-                    <a:p>
-                      <a:pPr algn="l"/>
-                      <a:r>
-                        <a:rPr sz="1000" b="0">
-                          <a:solidFill>
-                            <a:srgbClr val="1E2430"/>
-                          </a:solidFill>
-                          <a:latin typeface="맑은 고딕"/>
-                        </a:rPr>
-                        <a:t>7</a:t>
-                      </a:r>
-                    </a:p>
-                  </a:txBody>
-                  <a:tcPr marL="54864" marR="54864" marT="27432" marB="27432">
-                    <a:solidFill>
-                      <a:srgbClr val="EEF2F8"/>
-                    </a:solidFill>
-                  </a:tcPr>
-                </a:tc>
-                <a:tc>
-                  <a:txBody>
-                    <a:bodyPr wrap="square"/>
-                    <a:lstStyle/>
-                    <a:p>
-                      <a:pPr algn="ctr"/>
-                      <a:r>
-                        <a:rPr sz="1000" b="0">
-                          <a:solidFill>
-                            <a:srgbClr val="1E2430"/>
-                          </a:solidFill>
-                          <a:latin typeface="맑은 고딕"/>
-                        </a:rPr>
-                        <a:t>4/5</a:t>
-                      </a:r>
-                    </a:p>
-                  </a:txBody>
-                  <a:tcPr marL="54864" marR="54864" marT="27432" marB="27432">
-                    <a:solidFill>
-                      <a:srgbClr val="EEF2F8"/>
-                    </a:solidFill>
-                  </a:tcPr>
-                </a:tc>
-                <a:tc>
-                  <a:txBody>
-                    <a:bodyPr wrap="square"/>
-                    <a:lstStyle/>
-                    <a:p>
-                      <a:pPr algn="ctr"/>
-                      <a:r>
-                        <a:rPr sz="1000" b="0">
-                          <a:solidFill>
-                            <a:srgbClr val="1E2430"/>
-                          </a:solidFill>
-                          <a:latin typeface="맑은 고딕"/>
-                        </a:rPr>
-                        <a:t>11/12</a:t>
-                      </a:r>
-                    </a:p>
-                  </a:txBody>
-                  <a:tcPr marL="54864" marR="54864" marT="27432" marB="27432">
-                    <a:solidFill>
-                      <a:srgbClr val="EEF2F8"/>
-                    </a:solidFill>
-                  </a:tcPr>
-                </a:tc>
-                <a:tc>
-                  <a:txBody>
-                    <a:bodyPr wrap="square"/>
-                    <a:lstStyle/>
-                    <a:p>
-                      <a:pPr algn="ctr"/>
-                      <a:r>
-                        <a:rPr sz="1000" b="0">
-                          <a:solidFill>
-                            <a:srgbClr val="1E2430"/>
-                          </a:solidFill>
-                          <a:latin typeface="맑은 고딕"/>
-                        </a:rPr>
-                        <a:t>0</a:t>
-                      </a:r>
-                    </a:p>
-                  </a:txBody>
-                  <a:tcPr marL="54864" marR="54864" marT="27432" marB="27432">
-                    <a:solidFill>
-                      <a:srgbClr val="EEF2F8"/>
-                    </a:solidFill>
-                  </a:tcPr>
-                </a:tc>
-                <a:tc>
-                  <a:txBody>
-                    <a:bodyPr wrap="square"/>
-                    <a:lstStyle/>
-                    <a:p>
-                      <a:pPr algn="ctr"/>
-                      <a:r>
-                        <a:rPr sz="1000" b="0">
-                          <a:solidFill>
-                            <a:srgbClr val="1E2430"/>
-                          </a:solidFill>
-                          <a:latin typeface="맑은 고딕"/>
-                        </a:rPr>
-                        <a:t>10</a:t>
-                      </a:r>
-                    </a:p>
-                  </a:txBody>
-                  <a:tcPr marL="54864" marR="54864" marT="27432" marB="27432">
-                    <a:solidFill>
-                      <a:srgbClr val="EEF2F8"/>
-                    </a:solidFill>
-                  </a:tcPr>
-                </a:tc>
-              </a:tr>
-              <a:tr h="228600">
-                <a:tc>
-                  <a:txBody>
-                    <a:bodyPr wrap="square"/>
-                    <a:lstStyle/>
-                    <a:p>
-                      <a:pPr algn="l"/>
-                      <a:r>
-                        <a:rPr sz="1000" b="0">
-                          <a:solidFill>
-                            <a:srgbClr val="1E2430"/>
-                          </a:solidFill>
-                          <a:latin typeface="맑은 고딕"/>
-                        </a:rPr>
-                        <a:t>8</a:t>
-                      </a:r>
-                    </a:p>
-                  </a:txBody>
-                  <a:tcPr marL="54864" marR="54864" marT="27432" marB="27432">
-                    <a:solidFill>
-                      <a:srgbClr val="FFFFFF"/>
-                    </a:solidFill>
-                  </a:tcPr>
-                </a:tc>
-                <a:tc>
-                  <a:txBody>
-                    <a:bodyPr wrap="square"/>
-                    <a:lstStyle/>
-                    <a:p>
-                      <a:pPr algn="ctr"/>
-                      <a:r>
-                        <a:rPr sz="1000" b="0">
-                          <a:solidFill>
-                            <a:srgbClr val="1E2430"/>
-                          </a:solidFill>
-                          <a:latin typeface="맑은 고딕"/>
-                        </a:rPr>
-                        <a:t>10/10</a:t>
-                      </a:r>
-                    </a:p>
-                  </a:txBody>
-                  <a:tcPr marL="54864" marR="54864" marT="27432" marB="27432">
-                    <a:solidFill>
-                      <a:srgbClr val="FFFFFF"/>
-                    </a:solidFill>
-                  </a:tcPr>
-                </a:tc>
-                <a:tc>
-                  <a:txBody>
-                    <a:bodyPr wrap="square"/>
-                    <a:lstStyle/>
-                    <a:p>
-                      <a:pPr algn="ctr"/>
-                      <a:r>
-                        <a:rPr sz="1000" b="0">
-                          <a:solidFill>
-                            <a:srgbClr val="1E2430"/>
-                          </a:solidFill>
-                          <a:latin typeface="맑은 고딕"/>
-                        </a:rPr>
-                        <a:t>6/7</a:t>
-                      </a:r>
-                    </a:p>
-                  </a:txBody>
-                  <a:tcPr marL="54864" marR="54864" marT="27432" marB="27432">
-                    <a:solidFill>
-                      <a:srgbClr val="FFFFFF"/>
-                    </a:solidFill>
-                  </a:tcPr>
-                </a:tc>
-                <a:tc>
-                  <a:txBody>
-                    <a:bodyPr wrap="square"/>
-                    <a:lstStyle/>
-                    <a:p>
-                      <a:pPr algn="ctr"/>
-                      <a:r>
-                        <a:rPr sz="1000" b="0">
-                          <a:solidFill>
-                            <a:srgbClr val="1E2430"/>
-                          </a:solidFill>
-                          <a:latin typeface="맑은 고딕"/>
-                        </a:rPr>
-                        <a:t>0</a:t>
-                      </a:r>
-                    </a:p>
-                  </a:txBody>
-                  <a:tcPr marL="54864" marR="54864" marT="27432" marB="27432">
-                    <a:solidFill>
-                      <a:srgbClr val="FFFFFF"/>
-                    </a:solidFill>
-                  </a:tcPr>
-                </a:tc>
-                <a:tc>
-                  <a:txBody>
-                    <a:bodyPr wrap="square"/>
-                    <a:lstStyle/>
-                    <a:p>
-                      <a:pPr algn="ctr"/>
-                      <a:r>
-                        <a:rPr sz="1000" b="0">
-                          <a:solidFill>
-                            <a:srgbClr val="1E2430"/>
-                          </a:solidFill>
-                          <a:latin typeface="맑은 고딕"/>
-                        </a:rPr>
-                        <a:t>12</a:t>
-                      </a:r>
-                    </a:p>
-                  </a:txBody>
-                  <a:tcPr marL="54864" marR="54864" marT="27432" marB="27432">
-                    <a:solidFill>
-                      <a:srgbClr val="FFFFFF"/>
-                    </a:solidFill>
-                  </a:tcPr>
-                </a:tc>
-              </a:tr>
-              <a:tr h="228600">
-                <a:tc>
-                  <a:txBody>
-                    <a:bodyPr wrap="square"/>
-                    <a:lstStyle/>
-                    <a:p>
-                      <a:pPr algn="l"/>
-                      <a:r>
-                        <a:rPr sz="1000" b="0">
-                          <a:solidFill>
-                            <a:srgbClr val="1E2430"/>
-                          </a:solidFill>
-                          <a:latin typeface="맑은 고딕"/>
-                        </a:rPr>
-                        <a:t>9</a:t>
-                      </a:r>
-                    </a:p>
-                  </a:txBody>
-                  <a:tcPr marL="54864" marR="54864" marT="27432" marB="27432">
-                    <a:solidFill>
-                      <a:srgbClr val="EEF2F8"/>
-                    </a:solidFill>
-                  </a:tcPr>
-                </a:tc>
-                <a:tc>
-                  <a:txBody>
-                    <a:bodyPr wrap="square"/>
-                    <a:lstStyle/>
-                    <a:p>
-                      <a:pPr algn="ctr"/>
-                      <a:r>
-                        <a:rPr sz="1000" b="0">
-                          <a:solidFill>
-                            <a:srgbClr val="1E2430"/>
-                          </a:solidFill>
-                          <a:latin typeface="맑은 고딕"/>
-                        </a:rPr>
-                        <a:t>4/6</a:t>
-                      </a:r>
-                    </a:p>
-                  </a:txBody>
-                  <a:tcPr marL="54864" marR="54864" marT="27432" marB="27432">
-                    <a:solidFill>
-                      <a:srgbClr val="EEF2F8"/>
-                    </a:solidFill>
-                  </a:tcPr>
-                </a:tc>
-                <a:tc>
-                  <a:txBody>
-                    <a:bodyPr wrap="square"/>
-                    <a:lstStyle/>
-                    <a:p>
-                      <a:pPr algn="ctr"/>
-                      <a:r>
-                        <a:rPr sz="1000" b="0">
-                          <a:solidFill>
-                            <a:srgbClr val="1E2430"/>
-                          </a:solidFill>
-                          <a:latin typeface="맑은 고딕"/>
-                        </a:rPr>
-                        <a:t>12/12</a:t>
-                      </a:r>
-                    </a:p>
-                  </a:txBody>
-                  <a:tcPr marL="54864" marR="54864" marT="27432" marB="27432">
-                    <a:solidFill>
-                      <a:srgbClr val="EEF2F8"/>
-                    </a:solidFill>
-                  </a:tcPr>
-                </a:tc>
-                <a:tc>
-                  <a:txBody>
-                    <a:bodyPr wrap="square"/>
-                    <a:lstStyle/>
-                    <a:p>
-                      <a:pPr algn="ctr"/>
-                      <a:r>
-                        <a:rPr sz="1000" b="0">
-                          <a:solidFill>
-                            <a:srgbClr val="1E2430"/>
-                          </a:solidFill>
-                          <a:latin typeface="맑은 고딕"/>
-                        </a:rPr>
-                        <a:t>0</a:t>
-                      </a:r>
-                    </a:p>
-                  </a:txBody>
-                  <a:tcPr marL="54864" marR="54864" marT="27432" marB="27432">
-                    <a:solidFill>
-                      <a:srgbClr val="EEF2F8"/>
-                    </a:solidFill>
-                  </a:tcPr>
-                </a:tc>
-                <a:tc>
-                  <a:txBody>
-                    <a:bodyPr wrap="square"/>
-                    <a:lstStyle/>
-                    <a:p>
-                      <a:pPr algn="ctr"/>
-                      <a:r>
-                        <a:rPr sz="1000" b="0">
-                          <a:solidFill>
-                            <a:srgbClr val="1E2430"/>
-                          </a:solidFill>
-                          <a:latin typeface="맑은 고딕"/>
-                        </a:rPr>
-                        <a:t>11</a:t>
-                      </a:r>
-                    </a:p>
-                  </a:txBody>
-                  <a:tcPr marL="54864" marR="54864" marT="27432" marB="27432">
-                    <a:solidFill>
-                      <a:srgbClr val="EEF2F8"/>
-                    </a:solidFill>
-                  </a:tcPr>
-                </a:tc>
-              </a:tr>
-            </a:tbl>
-          </a:graphicData>
-        </a:graphic>
-      </p:graphicFrame>
-      <p:sp>
-        <p:nvSpPr>
-          <p:cNvPr id="6" name="Rounded Rectangle 5"/>
+          <p:cNvPr id="5" name="Rounded Rectangle 4"/>
           <p:cNvSpPr/>
           <p:nvPr/>
         </p:nvSpPr>
         <p:spPr>
           <a:xfrm>
-            <a:off x="7589520" y="4206240"/>
-            <a:ext cx="4114800" cy="1920240"/>
+            <a:off x="7589520" y="1234440"/>
+            <a:ext cx="4114800" cy="2377440"/>
           </a:xfrm>
           <a:prstGeom prst="roundRect">
             <a:avLst>
@@ -8407,6 +7648,112 @@
             <a:r>
               <a:rPr sz="1500" b="1">
                 <a:solidFill>
+                  <a:srgbClr val="284E92"/>
+                </a:solidFill>
+                <a:latin typeface="맑은 고딕"/>
+              </a:rPr>
+              <a:t>재확인과 점검표</a:t>
+            </a:r>
+          </a:p>
+          <a:p>
+            <a:pPr>
+              <a:spcAft>
+                <a:spcPts val="400"/>
+              </a:spcAft>
+            </a:pPr>
+            <a:r>
+              <a:rPr sz="1300" b="0">
+                <a:solidFill>
+                  <a:srgbClr val="1E2430"/>
+                </a:solidFill>
+                <a:latin typeface="맑은 고딕"/>
+              </a:rPr>
+              <a:t>재확인 113건: 찾음 98, 판정 고침 3</a:t>
+            </a:r>
+          </a:p>
+          <a:p>
+            <a:pPr>
+              <a:spcAft>
+                <a:spcPts val="400"/>
+              </a:spcAft>
+            </a:pPr>
+            <a:r>
+              <a:rPr sz="1300" b="0">
+                <a:solidFill>
+                  <a:srgbClr val="1E2430"/>
+                </a:solidFill>
+                <a:latin typeface="맑은 고딕"/>
+              </a:rPr>
+              <a:t>작업대 위 공구, 랙 끝 소화기처럼 경로에서 먼 물체를 CCTV 확대로 확인</a:t>
+            </a:r>
+          </a:p>
+          <a:p>
+            <a:pPr>
+              <a:spcAft>
+                <a:spcPts val="400"/>
+              </a:spcAft>
+            </a:pPr>
+            <a:r>
+              <a:rPr sz="1300" b="0">
+                <a:solidFill>
+                  <a:srgbClr val="1E2430"/>
+                </a:solidFill>
+                <a:latin typeface="맑은 고딕"/>
+              </a:rPr>
+              <a:t>확정 못 한 것은 '현장 확인' 으로 사람에게</a:t>
+            </a:r>
+          </a:p>
+        </p:txBody>
+      </p:sp>
+      <p:sp>
+        <p:nvSpPr>
+          <p:cNvPr id="6" name="Rounded Rectangle 5"/>
+          <p:cNvSpPr/>
+          <p:nvPr/>
+        </p:nvSpPr>
+        <p:spPr>
+          <a:xfrm>
+            <a:off x="7589520" y="3840480"/>
+            <a:ext cx="4114800" cy="2286000"/>
+          </a:xfrm>
+          <a:prstGeom prst="roundRect">
+            <a:avLst>
+              <a:gd name="adj" fmla="val 8000"/>
+            </a:avLst>
+          </a:prstGeom>
+          <a:solidFill>
+            <a:srgbClr val="EEF2F8"/>
+          </a:solidFill>
+          <a:ln>
+            <a:noFill/>
+          </a:ln>
+        </p:spPr>
+        <p:style>
+          <a:lnRef idx="1">
+            <a:schemeClr val="accent1"/>
+          </a:lnRef>
+          <a:fillRef idx="3">
+            <a:schemeClr val="accent1"/>
+          </a:fillRef>
+          <a:effectRef idx="2">
+            <a:schemeClr val="accent1"/>
+          </a:effectRef>
+          <a:fontRef idx="minor">
+            <a:schemeClr val="lt1"/>
+          </a:fontRef>
+        </p:style>
+        <p:txBody>
+          <a:bodyPr rtlCol="0" anchor="t" wrap="square" lIns="109728" rIns="109728" tIns="54864" bIns="54864"/>
+          <a:lstStyle/>
+          <a:p>
+            <a:pPr algn="ctr">
+              <a:spcAft>
+                <a:spcPts val="400"/>
+              </a:spcAft>
+            </a:pPr>
+            <a:r>
+              <a:rPr sz="1500" b="1">
+                <a:solidFill>
                   <a:srgbClr val="D93A3A"/>
                 </a:solidFill>
                 <a:latin typeface="맑은 고딕"/>
@@ -8427,7 +7774,7 @@
                 </a:solidFill>
                 <a:latin typeface="맑은 고딕"/>
               </a:rPr>
-              <a:t>8/12 건</a:t>
+              <a:t>24/27 건</a:t>
             </a:r>
           </a:p>
           <a:p>
@@ -8443,7 +7790,7 @@
                 </a:solidFill>
                 <a:latin typeface="맑은 고딕"/>
               </a:rPr>
-              <a:t>CCTV 에 보인 접근 사건 · 오경보 4번 · 거리 오차 0.29 m</a:t>
+              <a:t>오경보 6번 · 거리 오차 0.29 m</a:t>
             </a:r>
           </a:p>
         </p:txBody>

--- a/submission/발표자료.pptx
+++ b/submission/발표자료.pptx
@@ -4639,7 +4639,7 @@
                 </a:solidFill>
                 <a:latin typeface="맑은 고딕"/>
               </a:rPr>
-              <a:t>손가락 1~5
+              <a:t>손가락 1~5 → LLM 판단
 중·영·일 음성 안내</a:t>
             </a:r>
           </a:p>
@@ -4818,7 +4818,7 @@
         <p:spPr>
           <a:xfrm>
             <a:off x="457200" y="1097280"/>
-            <a:ext cx="11247120" cy="4066266"/>
+            <a:ext cx="11247120" cy="4239299"/>
           </a:xfrm>
           <a:prstGeom prst="rect">
             <a:avLst/>
@@ -5074,7 +5074,7 @@
                           </a:solidFill>
                           <a:latin typeface="맑은 고딕"/>
                         </a:rPr>
-                        <a:t>바디캠·CCTV·PTZ 명령·스피커, 손 인식, 다국어 음성</a:t>
+                        <a:t>바디캠·CCTV·PTZ, 손 인식, LLM(Qwen2.5-7B)이 부르는 도구, 음성</a:t>
                       </a:r>
                     </a:p>
                   </a:txBody>
@@ -6556,7 +6556,7 @@
                 </a:solidFill>
                 <a:latin typeface="맑은 고딕"/>
               </a:rPr>
-              <a:t>어떻게 알아듣나</a:t>
+              <a:t>어떻게 처리하나</a:t>
             </a:r>
           </a:p>
           <a:p>
@@ -6572,7 +6572,7 @@
                 </a:solidFill>
                 <a:latin typeface="맑은 고딕"/>
               </a:rPr>
-              <a:t>• MediaPipe 손 관절 21점 → 손가락마다 곧은지·손목에서 먼지, 엄지는 약지 뿌리까지 거리</a:t>
+              <a:t>• MediaPipe 손 관절 21점 → 손가락 1~5, 멈춘 손에서 3번 연속이면 명령</a:t>
             </a:r>
           </a:p>
           <a:p>
@@ -6588,7 +6588,7 @@
                 </a:solidFill>
                 <a:latin typeface="맑은 고딕"/>
               </a:rPr>
-              <a:t>• 같은 수가 3번 연속이면 명령 (손을 내려야 다시)</a:t>
+              <a:t>• LangGraph + 로컬 Qwen2.5-7B 가 도구 (화면 물체, 장비 정보, 위험물 대장, TBM) 로 보고 무엇을 말할지·근거 결정</a:t>
             </a:r>
           </a:p>
           <a:p>
@@ -6604,7 +6604,7 @@
                 </a:solidFill>
                 <a:latin typeface="맑은 고딕"/>
               </a:rPr>
-              <a:t>• 안내는 검수한 4개 언어 문장 틀 + 현장 용어집 (번역기는 '안전화→seat belt' 처럼 틀려서 안 씀)</a:t>
+              <a:t>• 말은 검수한 4개 언어 문장 틀 (번역기는 '안전화→seat belt' 처럼 틀림)</a:t>
             </a:r>
           </a:p>
         </p:txBody>
@@ -6678,7 +6678,7 @@
                 </a:solidFill>
                 <a:latin typeface="맑은 고딕"/>
               </a:rPr>
-              <a:t>35/40</a:t>
+              <a:t>37/40</a:t>
             </a:r>
           </a:p>
           <a:p>
@@ -6694,7 +6694,7 @@
                 </a:solidFill>
                 <a:latin typeface="맑은 고딕"/>
               </a:rPr>
-              <a:t>경로 8곳·조명 바꿔 손가락 1~5, 다른 명령 1번, 움직이는 손 잘못 실행 0</a:t>
+              <a:t>경로 8곳·조명 바꿔 손가락 1~5, 다른 명령 3번, 움직이는 손 잘못 실행 0</a:t>
             </a:r>
           </a:p>
           <a:p>
@@ -6710,7 +6710,7 @@
                 </a:solidFill>
                 <a:latin typeface="맑은 고딕"/>
               </a:rPr>
-              <a:t>시연 4/4 · English</a:t>
+              <a:t>시연 4/4 · English · LLM 결정 4/4</a:t>
             </a:r>
           </a:p>
         </p:txBody>
@@ -6749,7 +6749,7 @@
                 </a:solidFill>
                 <a:latin typeface="맑은 고딕"/>
               </a:rPr>
-              <a:t>시연 영상 (2분 48초): TBM(3) → 순찰·판정 → 운반 카트 설명(1) → 상자 싣고 끌기 → 공장 위험 스캔(2) → 관리자 호출(4) → 조치 지시서</a:t>
+              <a:t>시연 영상 (2분 40초): TBM(3) → 순찰·판정 → 운반 카트 설명(1) → 상자 싣고 끌기 → 공장 위험 스캔(2) → 관리자 호출(4) → 조치 지시서</a:t>
             </a:r>
           </a:p>
         </p:txBody>
@@ -7575,7 +7575,7 @@
                           </a:solidFill>
                           <a:latin typeface="맑은 고딕"/>
                         </a:rPr>
-                        <a:t>35/40</a:t>
+                        <a:t>37/40</a:t>
                       </a:r>
                       <a:r>
                         <a:rPr sz="1300" b="0">
@@ -7584,7 +7584,7 @@
                           </a:solidFill>
                           <a:latin typeface="맑은 고딕"/>
                         </a:rPr>
-                        <a:t> (88%)</a:t>
+                        <a:t> (92%)</a:t>
                       </a:r>
                     </a:p>
                   </a:txBody>
